--- a/decks/secrets/secrets.pptx
+++ b/decks/secrets/secrets.pptx
@@ -1210,6 +1210,13 @@
 <file path=ppt/slides/slide1.xml><?xml version="1.0" encoding="utf-8"?>
 <p:sld xmlns:a="http://schemas.openxmlformats.org/drawingml/2006/main" xmlns:r="http://schemas.openxmlformats.org/officeDocument/2006/relationships" xmlns:p="http://schemas.openxmlformats.org/presentationml/2006/main">
   <p:cSld name="Slide 1">
+    <p:bg>
+      <p:bgPr>
+        <a:solidFill>
+          <a:srgbClr val="1F3DFF"/>
+        </a:solidFill>
+      </p:bgPr>
+    </p:bg>
     <p:spTree>
       <p:nvGrpSpPr>
         <p:cNvPr id="1" name=""/>
@@ -1224,30 +1231,275 @@
           <a:chExt cx="0" cy="0"/>
         </a:xfrm>
       </p:grpSpPr>
-      <p:pic>
-        <p:nvPicPr>
-          <p:cNvPr id="2" name="Image 0" descr="/tmp/slide-1787840534893-8dtg639tv6t.png">    </p:cNvPr>
-          <p:cNvPicPr>
-            <a:picLocks noChangeAspect="1"/>
-          </p:cNvPicPr>
-          <p:nvPr/>
-        </p:nvPicPr>
-        <p:blipFill>
-          <a:blip r:embed="rId1"/>
-          <a:stretch>
-            <a:fillRect/>
-          </a:stretch>
-        </p:blipFill>
-        <p:spPr>
-          <a:xfrm>
-            <a:off x="0" y="0"/>
-            <a:ext cx="12188952" cy="6858000"/>
-          </a:xfrm>
-          <a:prstGeom prst="rect">
-            <a:avLst/>
-          </a:prstGeom>
-        </p:spPr>
-      </p:pic>
+      <p:sp>
+        <p:nvSpPr>
+          <p:cNvPr id="2" name="Text 0"/>
+          <p:cNvSpPr/>
+          <p:nvPr/>
+        </p:nvSpPr>
+        <p:spPr>
+          <a:xfrm>
+            <a:off x="609448" y="609600"/>
+            <a:ext cx="11189458" cy="260747"/>
+          </a:xfrm>
+          <a:prstGeom prst="rect">
+            <a:avLst/>
+          </a:prstGeom>
+          <a:noFill/>
+          <a:ln/>
+        </p:spPr>
+        <p:txBody>
+          <a:bodyPr wrap="square" lIns="0" tIns="0" rIns="0" bIns="0" rtlCol="0" anchor="t"/>
+          <a:lstStyle/>
+          <a:p>
+            <a:pPr algn="l" indent="0" marL="0">
+              <a:lnSpc>
+                <a:spcPts val="2053"/>
+              </a:lnSpc>
+              <a:spcAft>
+                <a:spcPts val="1600"/>
+              </a:spcAft>
+              <a:buNone/>
+            </a:pPr>
+            <a:r>
+              <a:rPr lang="en-US" sz="1466" b="1" dirty="0">
+                <a:solidFill>
+                  <a:srgbClr val="FFFFFF"/>
+                </a:solidFill>
+                <a:latin typeface="Archivo" pitchFamily="34" charset="0"/>
+                <a:ea typeface="Archivo" pitchFamily="34" charset="-122"/>
+                <a:cs typeface="Archivo" pitchFamily="34" charset="-120"/>
+              </a:rPr>
+              <a:t>SECRETS · PLATFORM ENGINEERING</a:t>
+            </a:r>
+            <a:endParaRPr lang="en-US" sz="1466" dirty="0"/>
+          </a:p>
+        </p:txBody>
+      </p:sp>
+      <p:sp>
+        <p:nvSpPr>
+          <p:cNvPr id="3" name="Text 1"/>
+          <p:cNvSpPr/>
+          <p:nvPr/>
+        </p:nvSpPr>
+        <p:spPr>
+          <a:xfrm>
+            <a:off x="609448" y="1073547"/>
+            <a:ext cx="11189458" cy="3352800"/>
+          </a:xfrm>
+          <a:prstGeom prst="rect">
+            <a:avLst/>
+          </a:prstGeom>
+          <a:noFill/>
+          <a:ln/>
+        </p:spPr>
+        <p:txBody>
+          <a:bodyPr wrap="square" lIns="0" tIns="0" rIns="0" bIns="0" rtlCol="0" anchor="t"/>
+          <a:lstStyle/>
+          <a:p>
+            <a:pPr algn="l" indent="0" marL="0">
+              <a:lnSpc>
+                <a:spcPts val="13198"/>
+              </a:lnSpc>
+              <a:spcAft>
+                <a:spcPts val="1866"/>
+              </a:spcAft>
+              <a:buNone/>
+            </a:pPr>
+            <a:r>
+              <a:rPr lang="en-US" sz="8799" dirty="0">
+                <a:solidFill>
+                  <a:srgbClr val="FFFFFF"/>
+                </a:solidFill>
+                <a:latin typeface="Anton" pitchFamily="34" charset="0"/>
+                <a:ea typeface="Anton" pitchFamily="34" charset="-122"/>
+                <a:cs typeface="Anton" pitchFamily="34" charset="-120"/>
+              </a:rPr>
+              <a:t>Revocability</a:t>
+            </a:r>
+            <a:endParaRPr lang="en-US" sz="8799" dirty="0"/>
+          </a:p>
+          <a:p>
+            <a:pPr algn="l" indent="0" marL="0">
+              <a:lnSpc>
+                <a:spcPts val="13198"/>
+              </a:lnSpc>
+              <a:spcAft>
+                <a:spcPts val="1866"/>
+              </a:spcAft>
+              <a:buNone/>
+            </a:pPr>
+            <a:r>
+              <a:rPr lang="en-US" sz="8799" dirty="0">
+                <a:solidFill>
+                  <a:srgbClr val="FFFFFF"/>
+                </a:solidFill>
+                <a:latin typeface="Anton" pitchFamily="34" charset="0"/>
+                <a:ea typeface="Anton" pitchFamily="34" charset="-122"/>
+                <a:cs typeface="Anton" pitchFamily="34" charset="-120"/>
+              </a:rPr>
+              <a:t>is the standard</a:t>
+            </a:r>
+            <a:endParaRPr lang="en-US" sz="8799" dirty="0"/>
+          </a:p>
+        </p:txBody>
+      </p:sp>
+      <p:sp>
+        <p:nvSpPr>
+          <p:cNvPr id="4" name="Text 2"/>
+          <p:cNvSpPr/>
+          <p:nvPr/>
+        </p:nvSpPr>
+        <p:spPr>
+          <a:xfrm>
+            <a:off x="609448" y="4663281"/>
+            <a:ext cx="10970057" cy="22225"/>
+          </a:xfrm>
+          <a:prstGeom prst="rect">
+            <a:avLst/>
+          </a:prstGeom>
+          <a:solidFill>
+            <a:srgbClr val="FFFFFF"/>
+          </a:solidFill>
+          <a:ln/>
+        </p:spPr>
+        <p:txBody>
+          <a:bodyPr wrap="square" rtlCol="0" anchor="ctr"/>
+          <a:lstStyle/>
+          <a:p>
+            <a:pPr indent="0" marL="0">
+              <a:buNone/>
+            </a:pPr>
+            <a:endParaRPr lang="en-US" dirty="0"/>
+          </a:p>
+        </p:txBody>
+      </p:sp>
+      <p:sp>
+        <p:nvSpPr>
+          <p:cNvPr id="5" name="Text 3"/>
+          <p:cNvSpPr/>
+          <p:nvPr/>
+        </p:nvSpPr>
+        <p:spPr>
+          <a:xfrm>
+            <a:off x="609448" y="4990306"/>
+            <a:ext cx="11189458" cy="806053"/>
+          </a:xfrm>
+          <a:prstGeom prst="rect">
+            <a:avLst/>
+          </a:prstGeom>
+          <a:noFill/>
+          <a:ln/>
+        </p:spPr>
+        <p:txBody>
+          <a:bodyPr wrap="square" lIns="0" tIns="0" rIns="0" bIns="0" rtlCol="0" anchor="t"/>
+          <a:lstStyle/>
+          <a:p>
+            <a:pPr algn="l" indent="0" marL="0">
+              <a:lnSpc>
+                <a:spcPts val="3173"/>
+              </a:lnSpc>
+              <a:buNone/>
+            </a:pPr>
+            <a:r>
+              <a:rPr lang="en-US" sz="2266" b="1" dirty="0">
+                <a:solidFill>
+                  <a:srgbClr val="FFFFFF"/>
+                </a:solidFill>
+                <a:latin typeface="Archivo" pitchFamily="34" charset="0"/>
+                <a:ea typeface="Archivo" pitchFamily="34" charset="-122"/>
+                <a:cs typeface="Archivo" pitchFamily="34" charset="-120"/>
+              </a:rPr>
+              <a:t>The rule is not “don’t commit secrets.” It is: how long does it take to revoke one — and that answer decides where a secret lives and how long it lasts.</a:t>
+            </a:r>
+            <a:endParaRPr lang="en-US" sz="2266" dirty="0"/>
+          </a:p>
+        </p:txBody>
+      </p:sp>
+      <p:sp>
+        <p:nvSpPr>
+          <p:cNvPr id="6" name="Text 4"/>
+          <p:cNvSpPr/>
+          <p:nvPr/>
+        </p:nvSpPr>
+        <p:spPr>
+          <a:xfrm>
+            <a:off x="609448" y="6101159"/>
+            <a:ext cx="1398682" cy="248841"/>
+          </a:xfrm>
+          <a:prstGeom prst="rect">
+            <a:avLst/>
+          </a:prstGeom>
+          <a:noFill/>
+          <a:ln/>
+        </p:spPr>
+        <p:txBody>
+          <a:bodyPr wrap="square" lIns="0" tIns="0" rIns="0" bIns="0" rtlCol="0" anchor="t"/>
+          <a:lstStyle/>
+          <a:p>
+            <a:pPr algn="l" indent="0" marL="0">
+              <a:lnSpc>
+                <a:spcPts val="1960"/>
+              </a:lnSpc>
+              <a:buNone/>
+            </a:pPr>
+            <a:r>
+              <a:rPr lang="en-US" sz="1400" dirty="0">
+                <a:solidFill>
+                  <a:srgbClr val="FFFFFF"/>
+                </a:solidFill>
+                <a:latin typeface="Archivo" pitchFamily="34" charset="0"/>
+                <a:ea typeface="Archivo" pitchFamily="34" charset="-122"/>
+                <a:cs typeface="Archivo" pitchFamily="34" charset="-120"/>
+              </a:rPr>
+              <a:t>Presenter · Team</a:t>
+            </a:r>
+            <a:endParaRPr lang="en-US" sz="1400" dirty="0"/>
+          </a:p>
+        </p:txBody>
+      </p:sp>
+      <p:sp>
+        <p:nvSpPr>
+          <p:cNvPr id="7" name="Text 5"/>
+          <p:cNvSpPr/>
+          <p:nvPr/>
+        </p:nvSpPr>
+        <p:spPr>
+          <a:xfrm>
+            <a:off x="11347787" y="6101159"/>
+            <a:ext cx="236351" cy="248841"/>
+          </a:xfrm>
+          <a:prstGeom prst="rect">
+            <a:avLst/>
+          </a:prstGeom>
+          <a:noFill/>
+          <a:ln/>
+        </p:spPr>
+        <p:txBody>
+          <a:bodyPr wrap="square" lIns="0" tIns="0" rIns="0" bIns="0" rtlCol="0" anchor="t"/>
+          <a:lstStyle/>
+          <a:p>
+            <a:pPr algn="l" indent="0" marL="0">
+              <a:lnSpc>
+                <a:spcPts val="1960"/>
+              </a:lnSpc>
+              <a:buNone/>
+            </a:pPr>
+            <a:r>
+              <a:rPr lang="en-US" sz="1400" b="1" dirty="0">
+                <a:solidFill>
+                  <a:srgbClr val="FFFFFF"/>
+                </a:solidFill>
+                <a:latin typeface="Archivo" pitchFamily="34" charset="0"/>
+                <a:ea typeface="Archivo" pitchFamily="34" charset="-122"/>
+                <a:cs typeface="Archivo" pitchFamily="34" charset="-120"/>
+              </a:rPr>
+              <a:t>01</a:t>
+            </a:r>
+            <a:endParaRPr lang="en-US" sz="1400" dirty="0"/>
+          </a:p>
+        </p:txBody>
+      </p:sp>
     </p:spTree>
   </p:cSld>
   <p:clrMapOvr>
@@ -1259,6 +1511,13 @@
 <file path=ppt/slides/slide2.xml><?xml version="1.0" encoding="utf-8"?>
 <p:sld xmlns:a="http://schemas.openxmlformats.org/drawingml/2006/main" xmlns:r="http://schemas.openxmlformats.org/officeDocument/2006/relationships" xmlns:p="http://schemas.openxmlformats.org/presentationml/2006/main">
   <p:cSld name="Slide 2">
+    <p:bg>
+      <p:bgPr>
+        <a:solidFill>
+          <a:srgbClr val="FF4D2E"/>
+        </a:solidFill>
+      </p:bgPr>
+    </p:bg>
     <p:spTree>
       <p:nvGrpSpPr>
         <p:cNvPr id="1" name=""/>
@@ -1273,30 +1532,539 @@
           <a:chExt cx="0" cy="0"/>
         </a:xfrm>
       </p:grpSpPr>
-      <p:pic>
-        <p:nvPicPr>
-          <p:cNvPr id="2" name="Image 0" descr="/tmp/slide-1787840535234-rcpqqvbb9wm.png">    </p:cNvPr>
-          <p:cNvPicPr>
-            <a:picLocks noChangeAspect="1"/>
-          </p:cNvPicPr>
-          <p:nvPr/>
-        </p:nvPicPr>
-        <p:blipFill>
-          <a:blip r:embed="rId1"/>
-          <a:stretch>
-            <a:fillRect/>
-          </a:stretch>
-        </p:blipFill>
-        <p:spPr>
-          <a:xfrm>
-            <a:off x="0" y="0"/>
-            <a:ext cx="12188952" cy="6858000"/>
-          </a:xfrm>
-          <a:prstGeom prst="rect">
-            <a:avLst/>
-          </a:prstGeom>
-        </p:spPr>
-      </p:pic>
+      <p:sp>
+        <p:nvSpPr>
+          <p:cNvPr id="2" name="Text 0"/>
+          <p:cNvSpPr/>
+          <p:nvPr/>
+        </p:nvSpPr>
+        <p:spPr>
+          <a:xfrm>
+            <a:off x="609448" y="609600"/>
+            <a:ext cx="11189458" cy="260747"/>
+          </a:xfrm>
+          <a:prstGeom prst="rect">
+            <a:avLst/>
+          </a:prstGeom>
+          <a:noFill/>
+          <a:ln/>
+        </p:spPr>
+        <p:txBody>
+          <a:bodyPr wrap="square" lIns="0" tIns="0" rIns="0" bIns="0" rtlCol="0" anchor="t"/>
+          <a:lstStyle/>
+          <a:p>
+            <a:pPr algn="l" indent="0" marL="0">
+              <a:lnSpc>
+                <a:spcPts val="2053"/>
+              </a:lnSpc>
+              <a:spcAft>
+                <a:spcPts val="800"/>
+              </a:spcAft>
+              <a:buNone/>
+            </a:pPr>
+            <a:r>
+              <a:rPr lang="en-US" sz="1466" b="1" dirty="0">
+                <a:solidFill>
+                  <a:srgbClr val="0E0E0E"/>
+                </a:solidFill>
+                <a:latin typeface="Archivo" pitchFamily="34" charset="0"/>
+                <a:ea typeface="Archivo" pitchFamily="34" charset="-122"/>
+                <a:cs typeface="Archivo" pitchFamily="34" charset="-120"/>
+              </a:rPr>
+              <a:t>THE RULE WE ACTUALLY TEACH</a:t>
+            </a:r>
+            <a:endParaRPr lang="en-US" sz="1466" dirty="0"/>
+          </a:p>
+        </p:txBody>
+      </p:sp>
+      <p:sp>
+        <p:nvSpPr>
+          <p:cNvPr id="3" name="Text 1"/>
+          <p:cNvSpPr/>
+          <p:nvPr/>
+        </p:nvSpPr>
+        <p:spPr>
+          <a:xfrm>
+            <a:off x="609448" y="971947"/>
+            <a:ext cx="11189458" cy="1320602"/>
+          </a:xfrm>
+          <a:prstGeom prst="rect">
+            <a:avLst/>
+          </a:prstGeom>
+          <a:noFill/>
+          <a:ln/>
+        </p:spPr>
+        <p:txBody>
+          <a:bodyPr wrap="square" lIns="0" tIns="0" rIns="0" bIns="0" rtlCol="0" anchor="t"/>
+          <a:lstStyle/>
+          <a:p>
+            <a:pPr algn="l" indent="0" marL="0">
+              <a:lnSpc>
+                <a:spcPts val="10399"/>
+              </a:lnSpc>
+              <a:spcAft>
+                <a:spcPts val="1067"/>
+              </a:spcAft>
+              <a:buNone/>
+            </a:pPr>
+            <a:r>
+              <a:rPr lang="en-US" sz="6932" dirty="0">
+                <a:solidFill>
+                  <a:srgbClr val="0E0E0E"/>
+                </a:solidFill>
+                <a:latin typeface="Anton" pitchFamily="34" charset="0"/>
+                <a:ea typeface="Anton" pitchFamily="34" charset="-122"/>
+                <a:cs typeface="Anton" pitchFamily="34" charset="-120"/>
+              </a:rPr>
+              <a:t>Why the usual rule fails</a:t>
+            </a:r>
+            <a:endParaRPr lang="en-US" sz="6932" dirty="0"/>
+          </a:p>
+        </p:txBody>
+      </p:sp>
+      <p:sp>
+        <p:nvSpPr>
+          <p:cNvPr id="4" name="Text 2"/>
+          <p:cNvSpPr/>
+          <p:nvPr/>
+        </p:nvSpPr>
+        <p:spPr>
+          <a:xfrm>
+            <a:off x="609448" y="2427883"/>
+            <a:ext cx="3498769" cy="3368477"/>
+          </a:xfrm>
+          <a:prstGeom prst="rect">
+            <a:avLst/>
+          </a:prstGeom>
+          <a:noFill/>
+          <a:ln w="25397">
+            <a:solidFill>
+              <a:srgbClr val="0E0E0E"/>
+            </a:solidFill>
+          </a:ln>
+        </p:spPr>
+        <p:txBody>
+          <a:bodyPr wrap="square" rtlCol="0" anchor="ctr"/>
+          <a:lstStyle/>
+          <a:p>
+            <a:pPr indent="0" marL="0">
+              <a:buNone/>
+            </a:pPr>
+            <a:endParaRPr lang="en-US" dirty="0"/>
+          </a:p>
+        </p:txBody>
+      </p:sp>
+      <p:sp>
+        <p:nvSpPr>
+          <p:cNvPr id="5" name="Text 3"/>
+          <p:cNvSpPr/>
+          <p:nvPr/>
+        </p:nvSpPr>
+        <p:spPr>
+          <a:xfrm>
+            <a:off x="871716" y="2656483"/>
+            <a:ext cx="3033716" cy="616347"/>
+          </a:xfrm>
+          <a:prstGeom prst="rect">
+            <a:avLst/>
+          </a:prstGeom>
+          <a:noFill/>
+          <a:ln/>
+        </p:spPr>
+        <p:txBody>
+          <a:bodyPr wrap="square" lIns="0" tIns="0" rIns="0" bIns="0" rtlCol="0" anchor="t"/>
+          <a:lstStyle/>
+          <a:p>
+            <a:pPr algn="l" indent="0" marL="0">
+              <a:lnSpc>
+                <a:spcPts val="2426"/>
+              </a:lnSpc>
+              <a:spcAft>
+                <a:spcPts val="1067"/>
+              </a:spcAft>
+              <a:buNone/>
+            </a:pPr>
+            <a:r>
+              <a:rPr lang="en-US" sz="1733" b="1" dirty="0">
+                <a:solidFill>
+                  <a:srgbClr val="0E0E0E"/>
+                </a:solidFill>
+                <a:latin typeface="Archivo" pitchFamily="34" charset="0"/>
+                <a:ea typeface="Archivo" pitchFamily="34" charset="-122"/>
+                <a:cs typeface="Archivo" pitchFamily="34" charset="-120"/>
+              </a:rPr>
+              <a:t>ONE LEAK PATH OF MANY</a:t>
+            </a:r>
+            <a:endParaRPr lang="en-US" sz="1733" dirty="0"/>
+          </a:p>
+        </p:txBody>
+      </p:sp>
+      <p:sp>
+        <p:nvSpPr>
+          <p:cNvPr id="6" name="Text 4"/>
+          <p:cNvSpPr/>
+          <p:nvPr/>
+        </p:nvSpPr>
+        <p:spPr>
+          <a:xfrm>
+            <a:off x="871716" y="3408164"/>
+            <a:ext cx="3033716" cy="2209800"/>
+          </a:xfrm>
+          <a:prstGeom prst="rect">
+            <a:avLst/>
+          </a:prstGeom>
+          <a:noFill/>
+          <a:ln/>
+        </p:spPr>
+        <p:txBody>
+          <a:bodyPr wrap="square" lIns="0" tIns="0" rIns="0" bIns="0" rtlCol="0" anchor="t"/>
+          <a:lstStyle/>
+          <a:p>
+            <a:pPr algn="l" indent="0" marL="0">
+              <a:lnSpc>
+                <a:spcPts val="2900"/>
+              </a:lnSpc>
+              <a:buNone/>
+            </a:pPr>
+            <a:r>
+              <a:rPr lang="en-US" sz="2000" dirty="0">
+                <a:solidFill>
+                  <a:srgbClr val="0E0E0E"/>
+                </a:solidFill>
+                <a:latin typeface="Archivo" pitchFamily="34" charset="0"/>
+                <a:ea typeface="Archivo" pitchFamily="34" charset="-122"/>
+                <a:cs typeface="Archivo" pitchFamily="34" charset="-120"/>
+              </a:rPr>
+              <a:t>A commit is one exit. Build logs, an error report, a screenshot in a ticket, a cached image and a laptop that has left the company are the others.</a:t>
+            </a:r>
+            <a:endParaRPr lang="en-US" sz="2000" dirty="0"/>
+          </a:p>
+        </p:txBody>
+      </p:sp>
+      <p:sp>
+        <p:nvSpPr>
+          <p:cNvPr id="7" name="Text 5"/>
+          <p:cNvSpPr/>
+          <p:nvPr/>
+        </p:nvSpPr>
+        <p:spPr>
+          <a:xfrm>
+            <a:off x="4345092" y="2427883"/>
+            <a:ext cx="3498769" cy="3368477"/>
+          </a:xfrm>
+          <a:prstGeom prst="rect">
+            <a:avLst/>
+          </a:prstGeom>
+          <a:noFill/>
+          <a:ln w="25397">
+            <a:solidFill>
+              <a:srgbClr val="0E0E0E"/>
+            </a:solidFill>
+          </a:ln>
+        </p:spPr>
+        <p:txBody>
+          <a:bodyPr wrap="square" rtlCol="0" anchor="ctr"/>
+          <a:lstStyle/>
+          <a:p>
+            <a:pPr indent="0" marL="0">
+              <a:buNone/>
+            </a:pPr>
+            <a:endParaRPr lang="en-US" dirty="0"/>
+          </a:p>
+        </p:txBody>
+      </p:sp>
+      <p:sp>
+        <p:nvSpPr>
+          <p:cNvPr id="8" name="Text 6"/>
+          <p:cNvSpPr/>
+          <p:nvPr/>
+        </p:nvSpPr>
+        <p:spPr>
+          <a:xfrm>
+            <a:off x="4607360" y="2656483"/>
+            <a:ext cx="3033716" cy="616347"/>
+          </a:xfrm>
+          <a:prstGeom prst="rect">
+            <a:avLst/>
+          </a:prstGeom>
+          <a:noFill/>
+          <a:ln/>
+        </p:spPr>
+        <p:txBody>
+          <a:bodyPr wrap="square" lIns="0" tIns="0" rIns="0" bIns="0" rtlCol="0" anchor="t"/>
+          <a:lstStyle/>
+          <a:p>
+            <a:pPr algn="l" indent="0" marL="0">
+              <a:lnSpc>
+                <a:spcPts val="2426"/>
+              </a:lnSpc>
+              <a:spcAft>
+                <a:spcPts val="1067"/>
+              </a:spcAft>
+              <a:buNone/>
+            </a:pPr>
+            <a:r>
+              <a:rPr lang="en-US" sz="1733" b="1" dirty="0">
+                <a:solidFill>
+                  <a:srgbClr val="0E0E0E"/>
+                </a:solidFill>
+                <a:latin typeface="Archivo" pitchFamily="34" charset="0"/>
+                <a:ea typeface="Archivo" pitchFamily="34" charset="-122"/>
+                <a:cs typeface="Archivo" pitchFamily="34" charset="-120"/>
+              </a:rPr>
+              <a:t>SILENT ON THE ONES ALREADY OUT</a:t>
+            </a:r>
+            <a:endParaRPr lang="en-US" sz="1733" dirty="0"/>
+          </a:p>
+        </p:txBody>
+      </p:sp>
+      <p:sp>
+        <p:nvSpPr>
+          <p:cNvPr id="9" name="Text 7"/>
+          <p:cNvSpPr/>
+          <p:nvPr/>
+        </p:nvSpPr>
+        <p:spPr>
+          <a:xfrm>
+            <a:off x="4607360" y="3408164"/>
+            <a:ext cx="3033716" cy="2209800"/>
+          </a:xfrm>
+          <a:prstGeom prst="rect">
+            <a:avLst/>
+          </a:prstGeom>
+          <a:noFill/>
+          <a:ln/>
+        </p:spPr>
+        <p:txBody>
+          <a:bodyPr wrap="square" lIns="0" tIns="0" rIns="0" bIns="0" rtlCol="0" anchor="t"/>
+          <a:lstStyle/>
+          <a:p>
+            <a:pPr algn="l" indent="0" marL="0">
+              <a:lnSpc>
+                <a:spcPts val="2900"/>
+              </a:lnSpc>
+              <a:buNone/>
+            </a:pPr>
+            <a:r>
+              <a:rPr lang="en-US" sz="2000" dirty="0">
+                <a:solidFill>
+                  <a:srgbClr val="0E0E0E"/>
+                </a:solidFill>
+                <a:latin typeface="Archivo" pitchFamily="34" charset="0"/>
+                <a:ea typeface="Archivo" pitchFamily="34" charset="-122"/>
+                <a:cs typeface="Archivo" pitchFamily="34" charset="-120"/>
+              </a:rPr>
+              <a:t>It is an instruction about tomorrow. Every credential already sitting in a repository, an image or a partner’s config is untouched by adopting it.</a:t>
+            </a:r>
+            <a:endParaRPr lang="en-US" sz="2000" dirty="0"/>
+          </a:p>
+        </p:txBody>
+      </p:sp>
+      <p:sp>
+        <p:nvSpPr>
+          <p:cNvPr id="10" name="Text 8"/>
+          <p:cNvSpPr/>
+          <p:nvPr/>
+        </p:nvSpPr>
+        <p:spPr>
+          <a:xfrm>
+            <a:off x="8080736" y="2427883"/>
+            <a:ext cx="3498769" cy="3368477"/>
+          </a:xfrm>
+          <a:prstGeom prst="rect">
+            <a:avLst/>
+          </a:prstGeom>
+          <a:solidFill>
+            <a:srgbClr val="FFFFFF"/>
+          </a:solidFill>
+          <a:ln w="25397">
+            <a:solidFill>
+              <a:srgbClr val="0E0E0E"/>
+            </a:solidFill>
+          </a:ln>
+        </p:spPr>
+        <p:txBody>
+          <a:bodyPr wrap="square" rtlCol="0" anchor="ctr"/>
+          <a:lstStyle/>
+          <a:p>
+            <a:pPr indent="0" marL="0">
+              <a:buNone/>
+            </a:pPr>
+            <a:endParaRPr lang="en-US" dirty="0"/>
+          </a:p>
+        </p:txBody>
+      </p:sp>
+      <p:sp>
+        <p:nvSpPr>
+          <p:cNvPr id="11" name="Text 9"/>
+          <p:cNvSpPr/>
+          <p:nvPr/>
+        </p:nvSpPr>
+        <p:spPr>
+          <a:xfrm>
+            <a:off x="8343004" y="2656483"/>
+            <a:ext cx="3033716" cy="616347"/>
+          </a:xfrm>
+          <a:prstGeom prst="rect">
+            <a:avLst/>
+          </a:prstGeom>
+          <a:noFill/>
+          <a:ln/>
+        </p:spPr>
+        <p:txBody>
+          <a:bodyPr wrap="square" lIns="0" tIns="0" rIns="0" bIns="0" rtlCol="0" anchor="t"/>
+          <a:lstStyle/>
+          <a:p>
+            <a:pPr algn="l" indent="0" marL="0">
+              <a:lnSpc>
+                <a:spcPts val="2426"/>
+              </a:lnSpc>
+              <a:spcAft>
+                <a:spcPts val="1067"/>
+              </a:spcAft>
+              <a:buNone/>
+            </a:pPr>
+            <a:r>
+              <a:rPr lang="en-US" sz="1733" b="1" dirty="0">
+                <a:solidFill>
+                  <a:srgbClr val="0E0E0E"/>
+                </a:solidFill>
+                <a:latin typeface="Archivo" pitchFamily="34" charset="0"/>
+                <a:ea typeface="Archivo" pitchFamily="34" charset="-122"/>
+                <a:cs typeface="Archivo" pitchFamily="34" charset="-120"/>
+              </a:rPr>
+              <a:t>NO FAILURE STATE</a:t>
+            </a:r>
+            <a:endParaRPr lang="en-US" sz="1733" dirty="0"/>
+          </a:p>
+        </p:txBody>
+      </p:sp>
+      <p:sp>
+        <p:nvSpPr>
+          <p:cNvPr id="12" name="Text 10"/>
+          <p:cNvSpPr/>
+          <p:nvPr/>
+        </p:nvSpPr>
+        <p:spPr>
+          <a:xfrm>
+            <a:off x="8343004" y="3408164"/>
+            <a:ext cx="3033716" cy="2209800"/>
+          </a:xfrm>
+          <a:prstGeom prst="rect">
+            <a:avLst/>
+          </a:prstGeom>
+          <a:noFill/>
+          <a:ln/>
+        </p:spPr>
+        <p:txBody>
+          <a:bodyPr wrap="square" lIns="0" tIns="0" rIns="0" bIns="0" rtlCol="0" anchor="t"/>
+          <a:lstStyle/>
+          <a:p>
+            <a:pPr algn="l" indent="0" marL="0">
+              <a:lnSpc>
+                <a:spcPts val="2900"/>
+              </a:lnSpc>
+              <a:buNone/>
+            </a:pPr>
+            <a:r>
+              <a:rPr lang="en-US" sz="2000" dirty="0">
+                <a:solidFill>
+                  <a:srgbClr val="0E0E0E"/>
+                </a:solidFill>
+                <a:latin typeface="Archivo" pitchFamily="34" charset="0"/>
+                <a:ea typeface="Archivo" pitchFamily="34" charset="-122"/>
+                <a:cs typeface="Archivo" pitchFamily="34" charset="-120"/>
+              </a:rPr>
+              <a:t>Nobody can observe a secret not being committed. There is nothing to check. A revocation either happened or it did not.</a:t>
+            </a:r>
+            <a:endParaRPr lang="en-US" sz="2000" dirty="0"/>
+          </a:p>
+        </p:txBody>
+      </p:sp>
+      <p:sp>
+        <p:nvSpPr>
+          <p:cNvPr id="13" name="Text 11"/>
+          <p:cNvSpPr/>
+          <p:nvPr/>
+        </p:nvSpPr>
+        <p:spPr>
+          <a:xfrm>
+            <a:off x="609448" y="6101159"/>
+            <a:ext cx="5698335" cy="248841"/>
+          </a:xfrm>
+          <a:prstGeom prst="rect">
+            <a:avLst/>
+          </a:prstGeom>
+          <a:noFill/>
+          <a:ln/>
+        </p:spPr>
+        <p:txBody>
+          <a:bodyPr wrap="square" lIns="0" tIns="0" rIns="0" bIns="0" rtlCol="0" anchor="t"/>
+          <a:lstStyle/>
+          <a:p>
+            <a:pPr algn="l" indent="0" marL="0">
+              <a:lnSpc>
+                <a:spcPts val="1960"/>
+              </a:lnSpc>
+              <a:buNone/>
+            </a:pPr>
+            <a:r>
+              <a:rPr lang="en-US" sz="1400" dirty="0">
+                <a:solidFill>
+                  <a:srgbClr val="0E0E0E"/>
+                </a:solidFill>
+                <a:latin typeface="Archivo" pitchFamily="34" charset="0"/>
+                <a:ea typeface="Archivo" pitchFamily="34" charset="-122"/>
+                <a:cs typeface="Archivo" pitchFamily="34" charset="-120"/>
+              </a:rPr>
+              <a:t>No sourced figures in this deck — the mechanism is argued, not priced.</a:t>
+            </a:r>
+            <a:endParaRPr lang="en-US" sz="1400" dirty="0"/>
+          </a:p>
+        </p:txBody>
+      </p:sp>
+      <p:sp>
+        <p:nvSpPr>
+          <p:cNvPr id="14" name="Text 12"/>
+          <p:cNvSpPr/>
+          <p:nvPr/>
+        </p:nvSpPr>
+        <p:spPr>
+          <a:xfrm>
+            <a:off x="11347787" y="6101159"/>
+            <a:ext cx="236351" cy="248841"/>
+          </a:xfrm>
+          <a:prstGeom prst="rect">
+            <a:avLst/>
+          </a:prstGeom>
+          <a:noFill/>
+          <a:ln/>
+        </p:spPr>
+        <p:txBody>
+          <a:bodyPr wrap="square" lIns="0" tIns="0" rIns="0" bIns="0" rtlCol="0" anchor="t"/>
+          <a:lstStyle/>
+          <a:p>
+            <a:pPr algn="l" indent="0" marL="0">
+              <a:lnSpc>
+                <a:spcPts val="1960"/>
+              </a:lnSpc>
+              <a:buNone/>
+            </a:pPr>
+            <a:r>
+              <a:rPr lang="en-US" sz="1400" b="1" dirty="0">
+                <a:solidFill>
+                  <a:srgbClr val="0E0E0E"/>
+                </a:solidFill>
+                <a:latin typeface="Archivo" pitchFamily="34" charset="0"/>
+                <a:ea typeface="Archivo" pitchFamily="34" charset="-122"/>
+                <a:cs typeface="Archivo" pitchFamily="34" charset="-120"/>
+              </a:rPr>
+              <a:t>02</a:t>
+            </a:r>
+            <a:endParaRPr lang="en-US" sz="1400" dirty="0"/>
+          </a:p>
+        </p:txBody>
+      </p:sp>
     </p:spTree>
   </p:cSld>
   <p:clrMapOvr>
@@ -1308,6 +2076,13 @@
 <file path=ppt/slides/slide3.xml><?xml version="1.0" encoding="utf-8"?>
 <p:sld xmlns:a="http://schemas.openxmlformats.org/drawingml/2006/main" xmlns:r="http://schemas.openxmlformats.org/officeDocument/2006/relationships" xmlns:p="http://schemas.openxmlformats.org/presentationml/2006/main">
   <p:cSld name="Slide 3">
+    <p:bg>
+      <p:bgPr>
+        <a:solidFill>
+          <a:srgbClr val="1F3DFF"/>
+        </a:solidFill>
+      </p:bgPr>
+    </p:bg>
     <p:spTree>
       <p:nvGrpSpPr>
         <p:cNvPr id="1" name=""/>
@@ -1322,30 +2097,530 @@
           <a:chExt cx="0" cy="0"/>
         </a:xfrm>
       </p:grpSpPr>
-      <p:pic>
-        <p:nvPicPr>
-          <p:cNvPr id="2" name="Image 0" descr="/tmp/slide-1787840535517-xuxlr9ifdqf.png">    </p:cNvPr>
-          <p:cNvPicPr>
-            <a:picLocks noChangeAspect="1"/>
-          </p:cNvPicPr>
-          <p:nvPr/>
-        </p:nvPicPr>
-        <p:blipFill>
-          <a:blip r:embed="rId1"/>
-          <a:stretch>
-            <a:fillRect/>
-          </a:stretch>
-        </p:blipFill>
-        <p:spPr>
-          <a:xfrm>
-            <a:off x="0" y="0"/>
-            <a:ext cx="12188952" cy="6858000"/>
-          </a:xfrm>
-          <a:prstGeom prst="rect">
-            <a:avLst/>
-          </a:prstGeom>
-        </p:spPr>
-      </p:pic>
+      <p:sp>
+        <p:nvSpPr>
+          <p:cNvPr id="2" name="Text 0"/>
+          <p:cNvSpPr/>
+          <p:nvPr/>
+        </p:nvSpPr>
+        <p:spPr>
+          <a:xfrm>
+            <a:off x="609448" y="609600"/>
+            <a:ext cx="11189458" cy="260747"/>
+          </a:xfrm>
+          <a:prstGeom prst="rect">
+            <a:avLst/>
+          </a:prstGeom>
+          <a:noFill/>
+          <a:ln/>
+        </p:spPr>
+        <p:txBody>
+          <a:bodyPr wrap="square" lIns="0" tIns="0" rIns="0" bIns="0" rtlCol="0" anchor="t"/>
+          <a:lstStyle/>
+          <a:p>
+            <a:pPr algn="l" indent="0" marL="0">
+              <a:lnSpc>
+                <a:spcPts val="2053"/>
+              </a:lnSpc>
+              <a:spcAft>
+                <a:spcPts val="800"/>
+              </a:spcAft>
+              <a:buNone/>
+            </a:pPr>
+            <a:r>
+              <a:rPr lang="en-US" sz="1466" b="1" dirty="0">
+                <a:solidFill>
+                  <a:srgbClr val="FFFFFF"/>
+                </a:solidFill>
+                <a:latin typeface="Archivo" pitchFamily="34" charset="0"/>
+                <a:ea typeface="Archivo" pitchFamily="34" charset="-122"/>
+                <a:cs typeface="Archivo" pitchFamily="34" charset="-120"/>
+              </a:rPr>
+              <a:t>THE PROPERTY WORTH DESIGNING FOR</a:t>
+            </a:r>
+            <a:endParaRPr lang="en-US" sz="1466" dirty="0"/>
+          </a:p>
+        </p:txBody>
+      </p:sp>
+      <p:sp>
+        <p:nvSpPr>
+          <p:cNvPr id="3" name="Text 1"/>
+          <p:cNvSpPr/>
+          <p:nvPr/>
+        </p:nvSpPr>
+        <p:spPr>
+          <a:xfrm>
+            <a:off x="609448" y="971947"/>
+            <a:ext cx="11189458" cy="1320602"/>
+          </a:xfrm>
+          <a:prstGeom prst="rect">
+            <a:avLst/>
+          </a:prstGeom>
+          <a:noFill/>
+          <a:ln/>
+        </p:spPr>
+        <p:txBody>
+          <a:bodyPr wrap="square" lIns="0" tIns="0" rIns="0" bIns="0" rtlCol="0" anchor="t"/>
+          <a:lstStyle/>
+          <a:p>
+            <a:pPr algn="l" indent="0" marL="0">
+              <a:lnSpc>
+                <a:spcPts val="10399"/>
+              </a:lnSpc>
+              <a:spcAft>
+                <a:spcPts val="1067"/>
+              </a:spcAft>
+              <a:buNone/>
+            </a:pPr>
+            <a:r>
+              <a:rPr lang="en-US" sz="6932" dirty="0">
+                <a:solidFill>
+                  <a:srgbClr val="FFFFFF"/>
+                </a:solidFill>
+                <a:latin typeface="Anton" pitchFamily="34" charset="0"/>
+                <a:ea typeface="Anton" pitchFamily="34" charset="-122"/>
+                <a:cs typeface="Anton" pitchFamily="34" charset="-120"/>
+              </a:rPr>
+              <a:t>What makes rotation cheap</a:t>
+            </a:r>
+            <a:endParaRPr lang="en-US" sz="6932" dirty="0"/>
+          </a:p>
+        </p:txBody>
+      </p:sp>
+      <p:sp>
+        <p:nvSpPr>
+          <p:cNvPr id="4" name="Text 2"/>
+          <p:cNvSpPr/>
+          <p:nvPr/>
+        </p:nvSpPr>
+        <p:spPr>
+          <a:xfrm>
+            <a:off x="609448" y="2427883"/>
+            <a:ext cx="10970057" cy="1032669"/>
+          </a:xfrm>
+          <a:prstGeom prst="rect">
+            <a:avLst/>
+          </a:prstGeom>
+          <a:noFill/>
+          <a:ln w="25397">
+            <a:solidFill>
+              <a:srgbClr val="FFFFFF"/>
+            </a:solidFill>
+          </a:ln>
+        </p:spPr>
+        <p:txBody>
+          <a:bodyPr wrap="square" rtlCol="0" anchor="ctr"/>
+          <a:lstStyle/>
+          <a:p>
+            <a:pPr indent="0" marL="0">
+              <a:buNone/>
+            </a:pPr>
+            <a:endParaRPr lang="en-US" dirty="0"/>
+          </a:p>
+        </p:txBody>
+      </p:sp>
+      <p:sp>
+        <p:nvSpPr>
+          <p:cNvPr id="5" name="Text 3"/>
+          <p:cNvSpPr/>
+          <p:nvPr/>
+        </p:nvSpPr>
+        <p:spPr>
+          <a:xfrm>
+            <a:off x="905641" y="2605683"/>
+            <a:ext cx="2590152" cy="307975"/>
+          </a:xfrm>
+          <a:prstGeom prst="rect">
+            <a:avLst/>
+          </a:prstGeom>
+          <a:noFill/>
+          <a:ln/>
+        </p:spPr>
+        <p:txBody>
+          <a:bodyPr wrap="square" lIns="0" tIns="0" rIns="0" bIns="0" rtlCol="0" anchor="t"/>
+          <a:lstStyle/>
+          <a:p>
+            <a:pPr algn="l" indent="0" marL="0">
+              <a:lnSpc>
+                <a:spcPts val="2426"/>
+              </a:lnSpc>
+              <a:buNone/>
+            </a:pPr>
+            <a:r>
+              <a:rPr lang="en-US" sz="1733" b="1" dirty="0">
+                <a:solidFill>
+                  <a:srgbClr val="FFFFFF"/>
+                </a:solidFill>
+                <a:latin typeface="Archivo" pitchFamily="34" charset="0"/>
+                <a:ea typeface="Archivo" pitchFamily="34" charset="-122"/>
+                <a:cs typeface="Archivo" pitchFamily="34" charset="-120"/>
+              </a:rPr>
+              <a:t>ONE ISSUER</a:t>
+            </a:r>
+            <a:endParaRPr lang="en-US" sz="1733" dirty="0"/>
+          </a:p>
+        </p:txBody>
+      </p:sp>
+      <p:sp>
+        <p:nvSpPr>
+          <p:cNvPr id="6" name="Text 4"/>
+          <p:cNvSpPr/>
+          <p:nvPr/>
+        </p:nvSpPr>
+        <p:spPr>
+          <a:xfrm>
+            <a:off x="3749730" y="2605683"/>
+            <a:ext cx="7684253" cy="736600"/>
+          </a:xfrm>
+          <a:prstGeom prst="rect">
+            <a:avLst/>
+          </a:prstGeom>
+          <a:noFill/>
+          <a:ln/>
+        </p:spPr>
+        <p:txBody>
+          <a:bodyPr wrap="square" lIns="0" tIns="0" rIns="0" bIns="0" rtlCol="0" anchor="t"/>
+          <a:lstStyle/>
+          <a:p>
+            <a:pPr algn="l" indent="0" marL="0">
+              <a:lnSpc>
+                <a:spcPts val="2900"/>
+              </a:lnSpc>
+              <a:buNone/>
+            </a:pPr>
+            <a:r>
+              <a:rPr lang="en-US" sz="2000" dirty="0">
+                <a:solidFill>
+                  <a:srgbClr val="FFFFFF"/>
+                </a:solidFill>
+                <a:latin typeface="Archivo" pitchFamily="34" charset="0"/>
+                <a:ea typeface="Archivo" pitchFamily="34" charset="-122"/>
+                <a:cs typeface="Archivo" pitchFamily="34" charset="-120"/>
+              </a:rPr>
+              <a:t>One authority mints it and can end it. If two systems can both issue it, neither of them can retire it alone.</a:t>
+            </a:r>
+            <a:endParaRPr lang="en-US" sz="2000" dirty="0"/>
+          </a:p>
+        </p:txBody>
+      </p:sp>
+      <p:sp>
+        <p:nvSpPr>
+          <p:cNvPr id="7" name="Text 5"/>
+          <p:cNvSpPr/>
+          <p:nvPr/>
+        </p:nvSpPr>
+        <p:spPr>
+          <a:xfrm>
+            <a:off x="609448" y="3595886"/>
+            <a:ext cx="10970057" cy="1032669"/>
+          </a:xfrm>
+          <a:prstGeom prst="rect">
+            <a:avLst/>
+          </a:prstGeom>
+          <a:solidFill>
+            <a:srgbClr val="FFFFFF"/>
+          </a:solidFill>
+          <a:ln w="25397">
+            <a:solidFill>
+              <a:srgbClr val="FFFFFF"/>
+            </a:solidFill>
+          </a:ln>
+        </p:spPr>
+        <p:txBody>
+          <a:bodyPr wrap="square" rtlCol="0" anchor="ctr"/>
+          <a:lstStyle/>
+          <a:p>
+            <a:pPr indent="0" marL="0">
+              <a:buNone/>
+            </a:pPr>
+            <a:endParaRPr lang="en-US" dirty="0"/>
+          </a:p>
+        </p:txBody>
+      </p:sp>
+      <p:sp>
+        <p:nvSpPr>
+          <p:cNvPr id="8" name="Text 6"/>
+          <p:cNvSpPr/>
+          <p:nvPr/>
+        </p:nvSpPr>
+        <p:spPr>
+          <a:xfrm>
+            <a:off x="905641" y="3773686"/>
+            <a:ext cx="2590152" cy="615950"/>
+          </a:xfrm>
+          <a:prstGeom prst="rect">
+            <a:avLst/>
+          </a:prstGeom>
+          <a:noFill/>
+          <a:ln/>
+        </p:spPr>
+        <p:txBody>
+          <a:bodyPr wrap="square" lIns="0" tIns="0" rIns="0" bIns="0" rtlCol="0" anchor="t"/>
+          <a:lstStyle/>
+          <a:p>
+            <a:pPr algn="l" indent="0" marL="0">
+              <a:lnSpc>
+                <a:spcPts val="2426"/>
+              </a:lnSpc>
+              <a:buNone/>
+            </a:pPr>
+            <a:r>
+              <a:rPr lang="en-US" sz="1733" b="1" dirty="0">
+                <a:solidFill>
+                  <a:srgbClr val="0E0E0E"/>
+                </a:solidFill>
+                <a:latin typeface="Archivo" pitchFamily="34" charset="0"/>
+                <a:ea typeface="Archivo" pitchFamily="34" charset="-122"/>
+                <a:cs typeface="Archivo" pitchFamily="34" charset="-120"/>
+              </a:rPr>
+              <a:t>ONE PATH TO THE HOLDER</a:t>
+            </a:r>
+            <a:endParaRPr lang="en-US" sz="1733" dirty="0"/>
+          </a:p>
+        </p:txBody>
+      </p:sp>
+      <p:sp>
+        <p:nvSpPr>
+          <p:cNvPr id="9" name="Text 7"/>
+          <p:cNvSpPr/>
+          <p:nvPr/>
+        </p:nvSpPr>
+        <p:spPr>
+          <a:xfrm>
+            <a:off x="3749730" y="3773686"/>
+            <a:ext cx="7684253" cy="736600"/>
+          </a:xfrm>
+          <a:prstGeom prst="rect">
+            <a:avLst/>
+          </a:prstGeom>
+          <a:noFill/>
+          <a:ln/>
+        </p:spPr>
+        <p:txBody>
+          <a:bodyPr wrap="square" lIns="0" tIns="0" rIns="0" bIns="0" rtlCol="0" anchor="t"/>
+          <a:lstStyle/>
+          <a:p>
+            <a:pPr algn="l" indent="0" marL="0">
+              <a:lnSpc>
+                <a:spcPts val="2900"/>
+              </a:lnSpc>
+              <a:buNone/>
+            </a:pPr>
+            <a:r>
+              <a:rPr lang="en-US" sz="2000" dirty="0">
+                <a:solidFill>
+                  <a:srgbClr val="0E0E0E"/>
+                </a:solidFill>
+                <a:latin typeface="Archivo" pitchFamily="34" charset="0"/>
+                <a:ea typeface="Archivo" pitchFamily="34" charset="-122"/>
+                <a:cs typeface="Archivo" pitchFamily="34" charset="-120"/>
+              </a:rPr>
+              <a:t>The workload reads it at run time from one place. Baked into an image or a config file, there is no single path to cut.</a:t>
+            </a:r>
+            <a:endParaRPr lang="en-US" sz="2000" dirty="0"/>
+          </a:p>
+        </p:txBody>
+      </p:sp>
+      <p:sp>
+        <p:nvSpPr>
+          <p:cNvPr id="10" name="Text 8"/>
+          <p:cNvSpPr/>
+          <p:nvPr/>
+        </p:nvSpPr>
+        <p:spPr>
+          <a:xfrm>
+            <a:off x="609448" y="4763889"/>
+            <a:ext cx="10970057" cy="1032669"/>
+          </a:xfrm>
+          <a:prstGeom prst="rect">
+            <a:avLst/>
+          </a:prstGeom>
+          <a:noFill/>
+          <a:ln w="25397">
+            <a:solidFill>
+              <a:srgbClr val="FFFFFF"/>
+            </a:solidFill>
+          </a:ln>
+        </p:spPr>
+        <p:txBody>
+          <a:bodyPr wrap="square" rtlCol="0" anchor="ctr"/>
+          <a:lstStyle/>
+          <a:p>
+            <a:pPr indent="0" marL="0">
+              <a:buNone/>
+            </a:pPr>
+            <a:endParaRPr lang="en-US" dirty="0"/>
+          </a:p>
+        </p:txBody>
+      </p:sp>
+      <p:sp>
+        <p:nvSpPr>
+          <p:cNvPr id="11" name="Text 9"/>
+          <p:cNvSpPr/>
+          <p:nvPr/>
+        </p:nvSpPr>
+        <p:spPr>
+          <a:xfrm>
+            <a:off x="905641" y="4941689"/>
+            <a:ext cx="2590152" cy="615950"/>
+          </a:xfrm>
+          <a:prstGeom prst="rect">
+            <a:avLst/>
+          </a:prstGeom>
+          <a:noFill/>
+          <a:ln/>
+        </p:spPr>
+        <p:txBody>
+          <a:bodyPr wrap="square" lIns="0" tIns="0" rIns="0" bIns="0" rtlCol="0" anchor="t"/>
+          <a:lstStyle/>
+          <a:p>
+            <a:pPr algn="l" indent="0" marL="0">
+              <a:lnSpc>
+                <a:spcPts val="2426"/>
+              </a:lnSpc>
+              <a:buNone/>
+            </a:pPr>
+            <a:r>
+              <a:rPr lang="en-US" sz="1733" b="1" dirty="0">
+                <a:solidFill>
+                  <a:srgbClr val="FFFFFF"/>
+                </a:solidFill>
+                <a:latin typeface="Archivo" pitchFamily="34" charset="0"/>
+                <a:ea typeface="Archivo" pitchFamily="34" charset="-122"/>
+                <a:cs typeface="Archivo" pitchFamily="34" charset="-120"/>
+              </a:rPr>
+              <a:t>NO HUMAN IN THE LOOP</a:t>
+            </a:r>
+            <a:endParaRPr lang="en-US" sz="1733" dirty="0"/>
+          </a:p>
+        </p:txBody>
+      </p:sp>
+      <p:sp>
+        <p:nvSpPr>
+          <p:cNvPr id="12" name="Text 10"/>
+          <p:cNvSpPr/>
+          <p:nvPr/>
+        </p:nvSpPr>
+        <p:spPr>
+          <a:xfrm>
+            <a:off x="3749730" y="4941689"/>
+            <a:ext cx="7684253" cy="736600"/>
+          </a:xfrm>
+          <a:prstGeom prst="rect">
+            <a:avLst/>
+          </a:prstGeom>
+          <a:noFill/>
+          <a:ln/>
+        </p:spPr>
+        <p:txBody>
+          <a:bodyPr wrap="square" lIns="0" tIns="0" rIns="0" bIns="0" rtlCol="0" anchor="t"/>
+          <a:lstStyle/>
+          <a:p>
+            <a:pPr algn="l" indent="0" marL="0">
+              <a:lnSpc>
+                <a:spcPts val="2900"/>
+              </a:lnSpc>
+              <a:buNone/>
+            </a:pPr>
+            <a:r>
+              <a:rPr lang="en-US" sz="2000" dirty="0">
+                <a:solidFill>
+                  <a:srgbClr val="FFFFFF"/>
+                </a:solidFill>
+                <a:latin typeface="Archivo" pitchFamily="34" charset="0"/>
+                <a:ea typeface="Archivo" pitchFamily="34" charset="-122"/>
+                <a:cs typeface="Archivo" pitchFamily="34" charset="-120"/>
+              </a:rPr>
+              <a:t>Rotation runs as a job on a schedule it owns. A rotation that needs a ticket happens after the incident, not before it.</a:t>
+            </a:r>
+            <a:endParaRPr lang="en-US" sz="2000" dirty="0"/>
+          </a:p>
+        </p:txBody>
+      </p:sp>
+      <p:sp>
+        <p:nvSpPr>
+          <p:cNvPr id="13" name="Text 11"/>
+          <p:cNvSpPr/>
+          <p:nvPr/>
+        </p:nvSpPr>
+        <p:spPr>
+          <a:xfrm>
+            <a:off x="609448" y="6101159"/>
+            <a:ext cx="5698335" cy="248841"/>
+          </a:xfrm>
+          <a:prstGeom prst="rect">
+            <a:avLst/>
+          </a:prstGeom>
+          <a:noFill/>
+          <a:ln/>
+        </p:spPr>
+        <p:txBody>
+          <a:bodyPr wrap="square" lIns="0" tIns="0" rIns="0" bIns="0" rtlCol="0" anchor="t"/>
+          <a:lstStyle/>
+          <a:p>
+            <a:pPr algn="l" indent="0" marL="0">
+              <a:lnSpc>
+                <a:spcPts val="1960"/>
+              </a:lnSpc>
+              <a:buNone/>
+            </a:pPr>
+            <a:r>
+              <a:rPr lang="en-US" sz="1400" dirty="0">
+                <a:solidFill>
+                  <a:srgbClr val="FFFFFF"/>
+                </a:solidFill>
+                <a:latin typeface="Archivo" pitchFamily="34" charset="0"/>
+                <a:ea typeface="Archivo" pitchFamily="34" charset="-122"/>
+                <a:cs typeface="Archivo" pitchFamily="34" charset="-120"/>
+              </a:rPr>
+              <a:t>No sourced figures in this deck — the mechanism is argued, not priced.</a:t>
+            </a:r>
+            <a:endParaRPr lang="en-US" sz="1400" dirty="0"/>
+          </a:p>
+        </p:txBody>
+      </p:sp>
+      <p:sp>
+        <p:nvSpPr>
+          <p:cNvPr id="14" name="Text 12"/>
+          <p:cNvSpPr/>
+          <p:nvPr/>
+        </p:nvSpPr>
+        <p:spPr>
+          <a:xfrm>
+            <a:off x="11347787" y="6101159"/>
+            <a:ext cx="236351" cy="248841"/>
+          </a:xfrm>
+          <a:prstGeom prst="rect">
+            <a:avLst/>
+          </a:prstGeom>
+          <a:noFill/>
+          <a:ln/>
+        </p:spPr>
+        <p:txBody>
+          <a:bodyPr wrap="square" lIns="0" tIns="0" rIns="0" bIns="0" rtlCol="0" anchor="t"/>
+          <a:lstStyle/>
+          <a:p>
+            <a:pPr algn="l" indent="0" marL="0">
+              <a:lnSpc>
+                <a:spcPts val="1960"/>
+              </a:lnSpc>
+              <a:buNone/>
+            </a:pPr>
+            <a:r>
+              <a:rPr lang="en-US" sz="1400" b="1" dirty="0">
+                <a:solidFill>
+                  <a:srgbClr val="FFFFFF"/>
+                </a:solidFill>
+                <a:latin typeface="Archivo" pitchFamily="34" charset="0"/>
+                <a:ea typeface="Archivo" pitchFamily="34" charset="-122"/>
+                <a:cs typeface="Archivo" pitchFamily="34" charset="-120"/>
+              </a:rPr>
+              <a:t>03</a:t>
+            </a:r>
+            <a:endParaRPr lang="en-US" sz="1400" dirty="0"/>
+          </a:p>
+        </p:txBody>
+      </p:sp>
     </p:spTree>
   </p:cSld>
   <p:clrMapOvr>
@@ -1357,6 +2632,13 @@
 <file path=ppt/slides/slide4.xml><?xml version="1.0" encoding="utf-8"?>
 <p:sld xmlns:a="http://schemas.openxmlformats.org/drawingml/2006/main" xmlns:r="http://schemas.openxmlformats.org/officeDocument/2006/relationships" xmlns:p="http://schemas.openxmlformats.org/presentationml/2006/main">
   <p:cSld name="Slide 4">
+    <p:bg>
+      <p:bgPr>
+        <a:solidFill>
+          <a:srgbClr val="FF4D2E"/>
+        </a:solidFill>
+      </p:bgPr>
+    </p:bg>
     <p:spTree>
       <p:nvGrpSpPr>
         <p:cNvPr id="1" name=""/>
@@ -1371,30 +2653,539 @@
           <a:chExt cx="0" cy="0"/>
         </a:xfrm>
       </p:grpSpPr>
-      <p:pic>
-        <p:nvPicPr>
-          <p:cNvPr id="2" name="Image 0" descr="/tmp/slide-1787840535846-be1vnu2iob.png">    </p:cNvPr>
-          <p:cNvPicPr>
-            <a:picLocks noChangeAspect="1"/>
-          </p:cNvPicPr>
-          <p:nvPr/>
-        </p:nvPicPr>
-        <p:blipFill>
-          <a:blip r:embed="rId1"/>
-          <a:stretch>
-            <a:fillRect/>
-          </a:stretch>
-        </p:blipFill>
-        <p:spPr>
-          <a:xfrm>
-            <a:off x="0" y="0"/>
-            <a:ext cx="12188952" cy="6858000"/>
-          </a:xfrm>
-          <a:prstGeom prst="rect">
-            <a:avLst/>
-          </a:prstGeom>
-        </p:spPr>
-      </p:pic>
+      <p:sp>
+        <p:nvSpPr>
+          <p:cNvPr id="2" name="Text 0"/>
+          <p:cNvSpPr/>
+          <p:nvPr/>
+        </p:nvSpPr>
+        <p:spPr>
+          <a:xfrm>
+            <a:off x="609448" y="609600"/>
+            <a:ext cx="11189458" cy="260747"/>
+          </a:xfrm>
+          <a:prstGeom prst="rect">
+            <a:avLst/>
+          </a:prstGeom>
+          <a:noFill/>
+          <a:ln/>
+        </p:spPr>
+        <p:txBody>
+          <a:bodyPr wrap="square" lIns="0" tIns="0" rIns="0" bIns="0" rtlCol="0" anchor="t"/>
+          <a:lstStyle/>
+          <a:p>
+            <a:pPr algn="l" indent="0" marL="0">
+              <a:lnSpc>
+                <a:spcPts val="2053"/>
+              </a:lnSpc>
+              <a:spcAft>
+                <a:spcPts val="800"/>
+              </a:spcAft>
+              <a:buNone/>
+            </a:pPr>
+            <a:r>
+              <a:rPr lang="en-US" sz="1466" b="1" dirty="0">
+                <a:solidFill>
+                  <a:srgbClr val="0E0E0E"/>
+                </a:solidFill>
+                <a:latin typeface="Archivo" pitchFamily="34" charset="0"/>
+                <a:ea typeface="Archivo" pitchFamily="34" charset="-122"/>
+                <a:cs typeface="Archivo" pitchFamily="34" charset="-120"/>
+              </a:rPr>
+              <a:t>WHAT THE POLICY CANNOT FIX</a:t>
+            </a:r>
+            <a:endParaRPr lang="en-US" sz="1466" dirty="0"/>
+          </a:p>
+        </p:txBody>
+      </p:sp>
+      <p:sp>
+        <p:nvSpPr>
+          <p:cNvPr id="3" name="Text 1"/>
+          <p:cNvSpPr/>
+          <p:nvPr/>
+        </p:nvSpPr>
+        <p:spPr>
+          <a:xfrm>
+            <a:off x="609448" y="971947"/>
+            <a:ext cx="11189458" cy="1320602"/>
+          </a:xfrm>
+          <a:prstGeom prst="rect">
+            <a:avLst/>
+          </a:prstGeom>
+          <a:noFill/>
+          <a:ln/>
+        </p:spPr>
+        <p:txBody>
+          <a:bodyPr wrap="square" lIns="0" tIns="0" rIns="0" bIns="0" rtlCol="0" anchor="t"/>
+          <a:lstStyle/>
+          <a:p>
+            <a:pPr algn="l" indent="0" marL="0">
+              <a:lnSpc>
+                <a:spcPts val="10399"/>
+              </a:lnSpc>
+              <a:spcAft>
+                <a:spcPts val="1067"/>
+              </a:spcAft>
+              <a:buNone/>
+            </a:pPr>
+            <a:r>
+              <a:rPr lang="en-US" sz="6932" dirty="0">
+                <a:solidFill>
+                  <a:srgbClr val="0E0E0E"/>
+                </a:solidFill>
+                <a:latin typeface="Anton" pitchFamily="34" charset="0"/>
+                <a:ea typeface="Anton" pitchFamily="34" charset="-122"/>
+                <a:cs typeface="Anton" pitchFamily="34" charset="-120"/>
+              </a:rPr>
+              <a:t>Unrotatable means permanent</a:t>
+            </a:r>
+            <a:endParaRPr lang="en-US" sz="6932" dirty="0"/>
+          </a:p>
+        </p:txBody>
+      </p:sp>
+      <p:sp>
+        <p:nvSpPr>
+          <p:cNvPr id="4" name="Text 2"/>
+          <p:cNvSpPr/>
+          <p:nvPr/>
+        </p:nvSpPr>
+        <p:spPr>
+          <a:xfrm>
+            <a:off x="609448" y="2427883"/>
+            <a:ext cx="3498769" cy="3368477"/>
+          </a:xfrm>
+          <a:prstGeom prst="rect">
+            <a:avLst/>
+          </a:prstGeom>
+          <a:noFill/>
+          <a:ln w="25397">
+            <a:solidFill>
+              <a:srgbClr val="0E0E0E"/>
+            </a:solidFill>
+          </a:ln>
+        </p:spPr>
+        <p:txBody>
+          <a:bodyPr wrap="square" rtlCol="0" anchor="ctr"/>
+          <a:lstStyle/>
+          <a:p>
+            <a:pPr indent="0" marL="0">
+              <a:buNone/>
+            </a:pPr>
+            <a:endParaRPr lang="en-US" dirty="0"/>
+          </a:p>
+        </p:txBody>
+      </p:sp>
+      <p:sp>
+        <p:nvSpPr>
+          <p:cNvPr id="5" name="Text 3"/>
+          <p:cNvSpPr/>
+          <p:nvPr/>
+        </p:nvSpPr>
+        <p:spPr>
+          <a:xfrm>
+            <a:off x="871716" y="2656483"/>
+            <a:ext cx="3033716" cy="616347"/>
+          </a:xfrm>
+          <a:prstGeom prst="rect">
+            <a:avLst/>
+          </a:prstGeom>
+          <a:noFill/>
+          <a:ln/>
+        </p:spPr>
+        <p:txBody>
+          <a:bodyPr wrap="square" lIns="0" tIns="0" rIns="0" bIns="0" rtlCol="0" anchor="t"/>
+          <a:lstStyle/>
+          <a:p>
+            <a:pPr algn="l" indent="0" marL="0">
+              <a:lnSpc>
+                <a:spcPts val="2426"/>
+              </a:lnSpc>
+              <a:spcAft>
+                <a:spcPts val="1067"/>
+              </a:spcAft>
+              <a:buNone/>
+            </a:pPr>
+            <a:r>
+              <a:rPr lang="en-US" sz="1733" b="1" dirty="0">
+                <a:solidFill>
+                  <a:srgbClr val="0E0E0E"/>
+                </a:solidFill>
+                <a:latin typeface="Archivo" pitchFamily="34" charset="0"/>
+                <a:ea typeface="Archivo" pitchFamily="34" charset="-122"/>
+                <a:cs typeface="Archivo" pitchFamily="34" charset="-120"/>
+              </a:rPr>
+              <a:t>IT OUTLIVES ITS POLICY</a:t>
+            </a:r>
+            <a:endParaRPr lang="en-US" sz="1733" dirty="0"/>
+          </a:p>
+        </p:txBody>
+      </p:sp>
+      <p:sp>
+        <p:nvSpPr>
+          <p:cNvPr id="6" name="Text 4"/>
+          <p:cNvSpPr/>
+          <p:nvPr/>
+        </p:nvSpPr>
+        <p:spPr>
+          <a:xfrm>
+            <a:off x="871716" y="3408164"/>
+            <a:ext cx="3033716" cy="2209800"/>
+          </a:xfrm>
+          <a:prstGeom prst="rect">
+            <a:avLst/>
+          </a:prstGeom>
+          <a:noFill/>
+          <a:ln/>
+        </p:spPr>
+        <p:txBody>
+          <a:bodyPr wrap="square" lIns="0" tIns="0" rIns="0" bIns="0" rtlCol="0" anchor="t"/>
+          <a:lstStyle/>
+          <a:p>
+            <a:pPr algn="l" indent="0" marL="0">
+              <a:lnSpc>
+                <a:spcPts val="2900"/>
+              </a:lnSpc>
+              <a:buNone/>
+            </a:pPr>
+            <a:r>
+              <a:rPr lang="en-US" sz="2000" dirty="0">
+                <a:solidFill>
+                  <a:srgbClr val="0E0E0E"/>
+                </a:solidFill>
+                <a:latin typeface="Archivo" pitchFamily="34" charset="0"/>
+                <a:ea typeface="Archivo" pitchFamily="34" charset="-122"/>
+                <a:cs typeface="Archivo" pitchFamily="34" charset="-120"/>
+              </a:rPr>
+              <a:t>The policy sets a lifetime, the plumbing sets the real one. Where the two disagree the plumbing wins, and the document is what is wrong.</a:t>
+            </a:r>
+            <a:endParaRPr lang="en-US" sz="2000" dirty="0"/>
+          </a:p>
+        </p:txBody>
+      </p:sp>
+      <p:sp>
+        <p:nvSpPr>
+          <p:cNvPr id="7" name="Text 5"/>
+          <p:cNvSpPr/>
+          <p:nvPr/>
+        </p:nvSpPr>
+        <p:spPr>
+          <a:xfrm>
+            <a:off x="4345092" y="2427883"/>
+            <a:ext cx="3498769" cy="3368477"/>
+          </a:xfrm>
+          <a:prstGeom prst="rect">
+            <a:avLst/>
+          </a:prstGeom>
+          <a:solidFill>
+            <a:srgbClr val="FFFFFF"/>
+          </a:solidFill>
+          <a:ln w="25397">
+            <a:solidFill>
+              <a:srgbClr val="0E0E0E"/>
+            </a:solidFill>
+          </a:ln>
+        </p:spPr>
+        <p:txBody>
+          <a:bodyPr wrap="square" rtlCol="0" anchor="ctr"/>
+          <a:lstStyle/>
+          <a:p>
+            <a:pPr indent="0" marL="0">
+              <a:buNone/>
+            </a:pPr>
+            <a:endParaRPr lang="en-US" dirty="0"/>
+          </a:p>
+        </p:txBody>
+      </p:sp>
+      <p:sp>
+        <p:nvSpPr>
+          <p:cNvPr id="8" name="Text 6"/>
+          <p:cNvSpPr/>
+          <p:nvPr/>
+        </p:nvSpPr>
+        <p:spPr>
+          <a:xfrm>
+            <a:off x="4607360" y="2656483"/>
+            <a:ext cx="3033716" cy="616347"/>
+          </a:xfrm>
+          <a:prstGeom prst="rect">
+            <a:avLst/>
+          </a:prstGeom>
+          <a:noFill/>
+          <a:ln/>
+        </p:spPr>
+        <p:txBody>
+          <a:bodyPr wrap="square" lIns="0" tIns="0" rIns="0" bIns="0" rtlCol="0" anchor="t"/>
+          <a:lstStyle/>
+          <a:p>
+            <a:pPr algn="l" indent="0" marL="0">
+              <a:lnSpc>
+                <a:spcPts val="2426"/>
+              </a:lnSpc>
+              <a:spcAft>
+                <a:spcPts val="1067"/>
+              </a:spcAft>
+              <a:buNone/>
+            </a:pPr>
+            <a:r>
+              <a:rPr lang="en-US" sz="1733" b="1" dirty="0">
+                <a:solidFill>
+                  <a:srgbClr val="0E0E0E"/>
+                </a:solidFill>
+                <a:latin typeface="Archivo" pitchFamily="34" charset="0"/>
+                <a:ea typeface="Archivo" pitchFamily="34" charset="-122"/>
+                <a:cs typeface="Archivo" pitchFamily="34" charset="-120"/>
+              </a:rPr>
+              <a:t>EVERY COPY IS LOAD-BEARING</a:t>
+            </a:r>
+            <a:endParaRPr lang="en-US" sz="1733" dirty="0"/>
+          </a:p>
+        </p:txBody>
+      </p:sp>
+      <p:sp>
+        <p:nvSpPr>
+          <p:cNvPr id="9" name="Text 7"/>
+          <p:cNvSpPr/>
+          <p:nvPr/>
+        </p:nvSpPr>
+        <p:spPr>
+          <a:xfrm>
+            <a:off x="4607360" y="3408164"/>
+            <a:ext cx="3033716" cy="2209800"/>
+          </a:xfrm>
+          <a:prstGeom prst="rect">
+            <a:avLst/>
+          </a:prstGeom>
+          <a:noFill/>
+          <a:ln/>
+        </p:spPr>
+        <p:txBody>
+          <a:bodyPr wrap="square" lIns="0" tIns="0" rIns="0" bIns="0" rtlCol="0" anchor="t"/>
+          <a:lstStyle/>
+          <a:p>
+            <a:pPr algn="l" indent="0" marL="0">
+              <a:lnSpc>
+                <a:spcPts val="2900"/>
+              </a:lnSpc>
+              <a:buNone/>
+            </a:pPr>
+            <a:r>
+              <a:rPr lang="en-US" sz="2000" dirty="0">
+                <a:solidFill>
+                  <a:srgbClr val="0E0E0E"/>
+                </a:solidFill>
+                <a:latin typeface="Archivo" pitchFamily="34" charset="0"/>
+                <a:ea typeface="Archivo" pitchFamily="34" charset="-122"/>
+                <a:cs typeface="Archivo" pitchFamily="34" charset="-120"/>
+              </a:rPr>
+              <a:t>Embedded in a partner integration, a device image or a signed artifact, revoking it breaks something. So nobody does.</a:t>
+            </a:r>
+            <a:endParaRPr lang="en-US" sz="2000" dirty="0"/>
+          </a:p>
+        </p:txBody>
+      </p:sp>
+      <p:sp>
+        <p:nvSpPr>
+          <p:cNvPr id="10" name="Text 8"/>
+          <p:cNvSpPr/>
+          <p:nvPr/>
+        </p:nvSpPr>
+        <p:spPr>
+          <a:xfrm>
+            <a:off x="8080736" y="2427883"/>
+            <a:ext cx="3498769" cy="3368477"/>
+          </a:xfrm>
+          <a:prstGeom prst="rect">
+            <a:avLst/>
+          </a:prstGeom>
+          <a:noFill/>
+          <a:ln w="25397">
+            <a:solidFill>
+              <a:srgbClr val="0E0E0E"/>
+            </a:solidFill>
+          </a:ln>
+        </p:spPr>
+        <p:txBody>
+          <a:bodyPr wrap="square" rtlCol="0" anchor="ctr"/>
+          <a:lstStyle/>
+          <a:p>
+            <a:pPr indent="0" marL="0">
+              <a:buNone/>
+            </a:pPr>
+            <a:endParaRPr lang="en-US" dirty="0"/>
+          </a:p>
+        </p:txBody>
+      </p:sp>
+      <p:sp>
+        <p:nvSpPr>
+          <p:cNvPr id="11" name="Text 9"/>
+          <p:cNvSpPr/>
+          <p:nvPr/>
+        </p:nvSpPr>
+        <p:spPr>
+          <a:xfrm>
+            <a:off x="8343004" y="2656483"/>
+            <a:ext cx="3033716" cy="616347"/>
+          </a:xfrm>
+          <a:prstGeom prst="rect">
+            <a:avLst/>
+          </a:prstGeom>
+          <a:noFill/>
+          <a:ln/>
+        </p:spPr>
+        <p:txBody>
+          <a:bodyPr wrap="square" lIns="0" tIns="0" rIns="0" bIns="0" rtlCol="0" anchor="t"/>
+          <a:lstStyle/>
+          <a:p>
+            <a:pPr algn="l" indent="0" marL="0">
+              <a:lnSpc>
+                <a:spcPts val="2426"/>
+              </a:lnSpc>
+              <a:spcAft>
+                <a:spcPts val="1067"/>
+              </a:spcAft>
+              <a:buNone/>
+            </a:pPr>
+            <a:r>
+              <a:rPr lang="en-US" sz="1733" b="1" dirty="0">
+                <a:solidFill>
+                  <a:srgbClr val="0E0E0E"/>
+                </a:solidFill>
+                <a:latin typeface="Archivo" pitchFamily="34" charset="0"/>
+                <a:ea typeface="Archivo" pitchFamily="34" charset="-122"/>
+                <a:cs typeface="Archivo" pitchFamily="34" charset="-120"/>
+              </a:rPr>
+              <a:t>THE EXIT IS AN OUTAGE</a:t>
+            </a:r>
+            <a:endParaRPr lang="en-US" sz="1733" dirty="0"/>
+          </a:p>
+        </p:txBody>
+      </p:sp>
+      <p:sp>
+        <p:nvSpPr>
+          <p:cNvPr id="12" name="Text 10"/>
+          <p:cNvSpPr/>
+          <p:nvPr/>
+        </p:nvSpPr>
+        <p:spPr>
+          <a:xfrm>
+            <a:off x="8343004" y="3408164"/>
+            <a:ext cx="3033716" cy="2209800"/>
+          </a:xfrm>
+          <a:prstGeom prst="rect">
+            <a:avLst/>
+          </a:prstGeom>
+          <a:noFill/>
+          <a:ln/>
+        </p:spPr>
+        <p:txBody>
+          <a:bodyPr wrap="square" lIns="0" tIns="0" rIns="0" bIns="0" rtlCol="0" anchor="t"/>
+          <a:lstStyle/>
+          <a:p>
+            <a:pPr algn="l" indent="0" marL="0">
+              <a:lnSpc>
+                <a:spcPts val="2900"/>
+              </a:lnSpc>
+              <a:buNone/>
+            </a:pPr>
+            <a:r>
+              <a:rPr lang="en-US" sz="2000" dirty="0">
+                <a:solidFill>
+                  <a:srgbClr val="0E0E0E"/>
+                </a:solidFill>
+                <a:latin typeface="Archivo" pitchFamily="34" charset="0"/>
+                <a:ea typeface="Archivo" pitchFamily="34" charset="-122"/>
+                <a:cs typeface="Archivo" pitchFamily="34" charset="-120"/>
+              </a:rPr>
+              <a:t>It will be revoked eventually — during an incident, by someone who did not choose the moment and cannot see who still depends on it.</a:t>
+            </a:r>
+            <a:endParaRPr lang="en-US" sz="2000" dirty="0"/>
+          </a:p>
+        </p:txBody>
+      </p:sp>
+      <p:sp>
+        <p:nvSpPr>
+          <p:cNvPr id="13" name="Text 11"/>
+          <p:cNvSpPr/>
+          <p:nvPr/>
+        </p:nvSpPr>
+        <p:spPr>
+          <a:xfrm>
+            <a:off x="609448" y="6101159"/>
+            <a:ext cx="5698335" cy="248841"/>
+          </a:xfrm>
+          <a:prstGeom prst="rect">
+            <a:avLst/>
+          </a:prstGeom>
+          <a:noFill/>
+          <a:ln/>
+        </p:spPr>
+        <p:txBody>
+          <a:bodyPr wrap="square" lIns="0" tIns="0" rIns="0" bIns="0" rtlCol="0" anchor="t"/>
+          <a:lstStyle/>
+          <a:p>
+            <a:pPr algn="l" indent="0" marL="0">
+              <a:lnSpc>
+                <a:spcPts val="1960"/>
+              </a:lnSpc>
+              <a:buNone/>
+            </a:pPr>
+            <a:r>
+              <a:rPr lang="en-US" sz="1400" dirty="0">
+                <a:solidFill>
+                  <a:srgbClr val="0E0E0E"/>
+                </a:solidFill>
+                <a:latin typeface="Archivo" pitchFamily="34" charset="0"/>
+                <a:ea typeface="Archivo" pitchFamily="34" charset="-122"/>
+                <a:cs typeface="Archivo" pitchFamily="34" charset="-120"/>
+              </a:rPr>
+              <a:t>No sourced figures in this deck — the mechanism is argued, not priced.</a:t>
+            </a:r>
+            <a:endParaRPr lang="en-US" sz="1400" dirty="0"/>
+          </a:p>
+        </p:txBody>
+      </p:sp>
+      <p:sp>
+        <p:nvSpPr>
+          <p:cNvPr id="14" name="Text 12"/>
+          <p:cNvSpPr/>
+          <p:nvPr/>
+        </p:nvSpPr>
+        <p:spPr>
+          <a:xfrm>
+            <a:off x="11347787" y="6101159"/>
+            <a:ext cx="236351" cy="248841"/>
+          </a:xfrm>
+          <a:prstGeom prst="rect">
+            <a:avLst/>
+          </a:prstGeom>
+          <a:noFill/>
+          <a:ln/>
+        </p:spPr>
+        <p:txBody>
+          <a:bodyPr wrap="square" lIns="0" tIns="0" rIns="0" bIns="0" rtlCol="0" anchor="t"/>
+          <a:lstStyle/>
+          <a:p>
+            <a:pPr algn="l" indent="0" marL="0">
+              <a:lnSpc>
+                <a:spcPts val="1960"/>
+              </a:lnSpc>
+              <a:buNone/>
+            </a:pPr>
+            <a:r>
+              <a:rPr lang="en-US" sz="1400" b="1" dirty="0">
+                <a:solidFill>
+                  <a:srgbClr val="0E0E0E"/>
+                </a:solidFill>
+                <a:latin typeface="Archivo" pitchFamily="34" charset="0"/>
+                <a:ea typeface="Archivo" pitchFamily="34" charset="-122"/>
+                <a:cs typeface="Archivo" pitchFamily="34" charset="-120"/>
+              </a:rPr>
+              <a:t>04</a:t>
+            </a:r>
+            <a:endParaRPr lang="en-US" sz="1400" dirty="0"/>
+          </a:p>
+        </p:txBody>
+      </p:sp>
     </p:spTree>
   </p:cSld>
   <p:clrMapOvr>
@@ -1406,6 +3197,13 @@
 <file path=ppt/slides/slide5.xml><?xml version="1.0" encoding="utf-8"?>
 <p:sld xmlns:a="http://schemas.openxmlformats.org/drawingml/2006/main" xmlns:r="http://schemas.openxmlformats.org/officeDocument/2006/relationships" xmlns:p="http://schemas.openxmlformats.org/presentationml/2006/main">
   <p:cSld name="Slide 5">
+    <p:bg>
+      <p:bgPr>
+        <a:solidFill>
+          <a:srgbClr val="1F3DFF"/>
+        </a:solidFill>
+      </p:bgPr>
+    </p:bg>
     <p:spTree>
       <p:nvGrpSpPr>
         <p:cNvPr id="1" name=""/>
@@ -1420,30 +3218,656 @@
           <a:chExt cx="0" cy="0"/>
         </a:xfrm>
       </p:grpSpPr>
-      <p:pic>
-        <p:nvPicPr>
-          <p:cNvPr id="2" name="Image 0" descr="/tmp/slide-1787840536119-w9gilaj48m9.png">    </p:cNvPr>
-          <p:cNvPicPr>
-            <a:picLocks noChangeAspect="1"/>
-          </p:cNvPicPr>
-          <p:nvPr/>
-        </p:nvPicPr>
-        <p:blipFill>
-          <a:blip r:embed="rId1"/>
-          <a:stretch>
-            <a:fillRect/>
-          </a:stretch>
-        </p:blipFill>
-        <p:spPr>
-          <a:xfrm>
-            <a:off x="0" y="0"/>
-            <a:ext cx="12188952" cy="6858000"/>
-          </a:xfrm>
-          <a:prstGeom prst="rect">
-            <a:avLst/>
-          </a:prstGeom>
-        </p:spPr>
-      </p:pic>
+      <p:sp>
+        <p:nvSpPr>
+          <p:cNvPr id="2" name="Text 0"/>
+          <p:cNvSpPr/>
+          <p:nvPr/>
+        </p:nvSpPr>
+        <p:spPr>
+          <a:xfrm>
+            <a:off x="609448" y="609600"/>
+            <a:ext cx="11189458" cy="260747"/>
+          </a:xfrm>
+          <a:prstGeom prst="rect">
+            <a:avLst/>
+          </a:prstGeom>
+          <a:noFill/>
+          <a:ln/>
+        </p:spPr>
+        <p:txBody>
+          <a:bodyPr wrap="square" lIns="0" tIns="0" rIns="0" bIns="0" rtlCol="0" anchor="t"/>
+          <a:lstStyle/>
+          <a:p>
+            <a:pPr algn="l" indent="0" marL="0">
+              <a:lnSpc>
+                <a:spcPts val="2053"/>
+              </a:lnSpc>
+              <a:spcAft>
+                <a:spcPts val="800"/>
+              </a:spcAft>
+              <a:buNone/>
+            </a:pPr>
+            <a:r>
+              <a:rPr lang="en-US" sz="1466" b="1" dirty="0">
+                <a:solidFill>
+                  <a:srgbClr val="FFFFFF"/>
+                </a:solidFill>
+                <a:latin typeface="Archivo" pitchFamily="34" charset="0"/>
+                <a:ea typeface="Archivo" pitchFamily="34" charset="-122"/>
+                <a:cs typeface="Archivo" pitchFamily="34" charset="-120"/>
+              </a:rPr>
+              <a:t>THREE DECISIONS, NOT THREE OPINIONS</a:t>
+            </a:r>
+            <a:endParaRPr lang="en-US" sz="1466" dirty="0"/>
+          </a:p>
+        </p:txBody>
+      </p:sp>
+      <p:sp>
+        <p:nvSpPr>
+          <p:cNvPr id="3" name="Text 1"/>
+          <p:cNvSpPr/>
+          <p:nvPr/>
+        </p:nvSpPr>
+        <p:spPr>
+          <a:xfrm>
+            <a:off x="609448" y="971947"/>
+            <a:ext cx="11189458" cy="1320602"/>
+          </a:xfrm>
+          <a:prstGeom prst="rect">
+            <a:avLst/>
+          </a:prstGeom>
+          <a:noFill/>
+          <a:ln/>
+        </p:spPr>
+        <p:txBody>
+          <a:bodyPr wrap="square" lIns="0" tIns="0" rIns="0" bIns="0" rtlCol="0" anchor="t"/>
+          <a:lstStyle/>
+          <a:p>
+            <a:pPr algn="l" indent="0" marL="0">
+              <a:lnSpc>
+                <a:spcPts val="10399"/>
+              </a:lnSpc>
+              <a:spcAft>
+                <a:spcPts val="1067"/>
+              </a:spcAft>
+              <a:buNone/>
+            </a:pPr>
+            <a:r>
+              <a:rPr lang="en-US" sz="6932" dirty="0">
+                <a:solidFill>
+                  <a:srgbClr val="FFFFFF"/>
+                </a:solidFill>
+                <a:latin typeface="Anton" pitchFamily="34" charset="0"/>
+                <a:ea typeface="Anton" pitchFamily="34" charset="-122"/>
+                <a:cs typeface="Anton" pitchFamily="34" charset="-120"/>
+              </a:rPr>
+              <a:t>What we need to decide</a:t>
+            </a:r>
+            <a:endParaRPr lang="en-US" sz="6932" dirty="0"/>
+          </a:p>
+        </p:txBody>
+      </p:sp>
+      <p:sp>
+        <p:nvSpPr>
+          <p:cNvPr id="4" name="Text 2"/>
+          <p:cNvSpPr/>
+          <p:nvPr/>
+        </p:nvSpPr>
+        <p:spPr>
+          <a:xfrm>
+            <a:off x="609448" y="2427883"/>
+            <a:ext cx="10970057" cy="1032669"/>
+          </a:xfrm>
+          <a:prstGeom prst="rect">
+            <a:avLst/>
+          </a:prstGeom>
+          <a:noFill/>
+          <a:ln w="25397">
+            <a:solidFill>
+              <a:srgbClr val="FFFFFF"/>
+            </a:solidFill>
+          </a:ln>
+        </p:spPr>
+        <p:txBody>
+          <a:bodyPr wrap="square" rtlCol="0" anchor="ctr"/>
+          <a:lstStyle/>
+          <a:p>
+            <a:pPr indent="0" marL="0">
+              <a:buNone/>
+            </a:pPr>
+            <a:endParaRPr lang="en-US" dirty="0"/>
+          </a:p>
+        </p:txBody>
+      </p:sp>
+      <p:sp>
+        <p:nvSpPr>
+          <p:cNvPr id="5" name="Text 3"/>
+          <p:cNvSpPr/>
+          <p:nvPr/>
+        </p:nvSpPr>
+        <p:spPr>
+          <a:xfrm>
+            <a:off x="905641" y="2605683"/>
+            <a:ext cx="794246" cy="711002"/>
+          </a:xfrm>
+          <a:prstGeom prst="rect">
+            <a:avLst/>
+          </a:prstGeom>
+          <a:noFill/>
+          <a:ln/>
+        </p:spPr>
+        <p:txBody>
+          <a:bodyPr wrap="square" lIns="0" tIns="0" rIns="0" bIns="0" rtlCol="0" anchor="t"/>
+          <a:lstStyle/>
+          <a:p>
+            <a:pPr algn="l" indent="0" marL="0">
+              <a:lnSpc>
+                <a:spcPts val="5599"/>
+              </a:lnSpc>
+              <a:buNone/>
+            </a:pPr>
+            <a:r>
+              <a:rPr lang="en-US" sz="3733" dirty="0">
+                <a:solidFill>
+                  <a:srgbClr val="FFFFFF"/>
+                </a:solidFill>
+                <a:latin typeface="Anton" pitchFamily="34" charset="0"/>
+                <a:ea typeface="Anton" pitchFamily="34" charset="-122"/>
+                <a:cs typeface="Anton" pitchFamily="34" charset="-120"/>
+              </a:rPr>
+              <a:t>01</a:t>
+            </a:r>
+            <a:endParaRPr lang="en-US" sz="3733" dirty="0"/>
+          </a:p>
+        </p:txBody>
+      </p:sp>
+      <p:sp>
+        <p:nvSpPr>
+          <p:cNvPr id="6" name="Text 4"/>
+          <p:cNvSpPr/>
+          <p:nvPr/>
+        </p:nvSpPr>
+        <p:spPr>
+          <a:xfrm>
+            <a:off x="1989037" y="2605683"/>
+            <a:ext cx="2590152" cy="307975"/>
+          </a:xfrm>
+          <a:prstGeom prst="rect">
+            <a:avLst/>
+          </a:prstGeom>
+          <a:noFill/>
+          <a:ln/>
+        </p:spPr>
+        <p:txBody>
+          <a:bodyPr wrap="square" lIns="0" tIns="0" rIns="0" bIns="0" rtlCol="0" anchor="t"/>
+          <a:lstStyle/>
+          <a:p>
+            <a:pPr algn="l" indent="0" marL="0">
+              <a:lnSpc>
+                <a:spcPts val="2426"/>
+              </a:lnSpc>
+              <a:buNone/>
+            </a:pPr>
+            <a:r>
+              <a:rPr lang="en-US" sz="1733" b="1" dirty="0">
+                <a:solidFill>
+                  <a:srgbClr val="FFFFFF"/>
+                </a:solidFill>
+                <a:latin typeface="Archivo" pitchFamily="34" charset="0"/>
+                <a:ea typeface="Archivo" pitchFamily="34" charset="-122"/>
+                <a:cs typeface="Archivo" pitchFamily="34" charset="-120"/>
+              </a:rPr>
+              <a:t>THE KEEP RULE</a:t>
+            </a:r>
+            <a:endParaRPr lang="en-US" sz="1733" dirty="0"/>
+          </a:p>
+        </p:txBody>
+      </p:sp>
+      <p:sp>
+        <p:nvSpPr>
+          <p:cNvPr id="7" name="Text 5"/>
+          <p:cNvSpPr/>
+          <p:nvPr/>
+        </p:nvSpPr>
+        <p:spPr>
+          <a:xfrm>
+            <a:off x="4833126" y="2605683"/>
+            <a:ext cx="6579189" cy="736600"/>
+          </a:xfrm>
+          <a:prstGeom prst="rect">
+            <a:avLst/>
+          </a:prstGeom>
+          <a:noFill/>
+          <a:ln/>
+        </p:spPr>
+        <p:txBody>
+          <a:bodyPr wrap="square" lIns="0" tIns="0" rIns="0" bIns="0" rtlCol="0" anchor="t"/>
+          <a:lstStyle/>
+          <a:p>
+            <a:pPr algn="l" indent="0" marL="0">
+              <a:lnSpc>
+                <a:spcPts val="2900"/>
+              </a:lnSpc>
+              <a:buNone/>
+            </a:pPr>
+            <a:r>
+              <a:rPr lang="en-US" sz="2000" dirty="0">
+                <a:solidFill>
+                  <a:srgbClr val="FFFFFF"/>
+                </a:solidFill>
+                <a:latin typeface="Archivo" pitchFamily="34" charset="0"/>
+                <a:ea typeface="Archivo" pitchFamily="34" charset="-122"/>
+                <a:cs typeface="Archivo" pitchFamily="34" charset="-120"/>
+              </a:rPr>
+              <a:t>Do we keep any secret we cannot rotate automatically, and if so under what named, dated and owned exception?</a:t>
+            </a:r>
+            <a:endParaRPr lang="en-US" sz="2000" dirty="0"/>
+          </a:p>
+        </p:txBody>
+      </p:sp>
+      <p:sp>
+        <p:nvSpPr>
+          <p:cNvPr id="8" name="Text 6"/>
+          <p:cNvSpPr/>
+          <p:nvPr/>
+        </p:nvSpPr>
+        <p:spPr>
+          <a:xfrm>
+            <a:off x="609448" y="3595886"/>
+            <a:ext cx="10970057" cy="1032669"/>
+          </a:xfrm>
+          <a:prstGeom prst="rect">
+            <a:avLst/>
+          </a:prstGeom>
+          <a:solidFill>
+            <a:srgbClr val="FFFFFF"/>
+          </a:solidFill>
+          <a:ln w="25397">
+            <a:solidFill>
+              <a:srgbClr val="FFFFFF"/>
+            </a:solidFill>
+          </a:ln>
+        </p:spPr>
+        <p:txBody>
+          <a:bodyPr wrap="square" rtlCol="0" anchor="ctr"/>
+          <a:lstStyle/>
+          <a:p>
+            <a:pPr indent="0" marL="0">
+              <a:buNone/>
+            </a:pPr>
+            <a:endParaRPr lang="en-US" dirty="0"/>
+          </a:p>
+        </p:txBody>
+      </p:sp>
+      <p:sp>
+        <p:nvSpPr>
+          <p:cNvPr id="9" name="Text 7"/>
+          <p:cNvSpPr/>
+          <p:nvPr/>
+        </p:nvSpPr>
+        <p:spPr>
+          <a:xfrm>
+            <a:off x="905641" y="3773686"/>
+            <a:ext cx="794246" cy="711002"/>
+          </a:xfrm>
+          <a:prstGeom prst="rect">
+            <a:avLst/>
+          </a:prstGeom>
+          <a:noFill/>
+          <a:ln/>
+        </p:spPr>
+        <p:txBody>
+          <a:bodyPr wrap="square" lIns="0" tIns="0" rIns="0" bIns="0" rtlCol="0" anchor="t"/>
+          <a:lstStyle/>
+          <a:p>
+            <a:pPr algn="l" indent="0" marL="0">
+              <a:lnSpc>
+                <a:spcPts val="5599"/>
+              </a:lnSpc>
+              <a:buNone/>
+            </a:pPr>
+            <a:r>
+              <a:rPr lang="en-US" sz="3733" dirty="0">
+                <a:solidFill>
+                  <a:srgbClr val="0E0E0E"/>
+                </a:solidFill>
+                <a:latin typeface="Anton" pitchFamily="34" charset="0"/>
+                <a:ea typeface="Anton" pitchFamily="34" charset="-122"/>
+                <a:cs typeface="Anton" pitchFamily="34" charset="-120"/>
+              </a:rPr>
+              <a:t>02</a:t>
+            </a:r>
+            <a:endParaRPr lang="en-US" sz="3733" dirty="0"/>
+          </a:p>
+        </p:txBody>
+      </p:sp>
+      <p:sp>
+        <p:nvSpPr>
+          <p:cNvPr id="10" name="Text 8"/>
+          <p:cNvSpPr/>
+          <p:nvPr/>
+        </p:nvSpPr>
+        <p:spPr>
+          <a:xfrm>
+            <a:off x="1989037" y="3773686"/>
+            <a:ext cx="2590152" cy="615950"/>
+          </a:xfrm>
+          <a:prstGeom prst="rect">
+            <a:avLst/>
+          </a:prstGeom>
+          <a:noFill/>
+          <a:ln/>
+        </p:spPr>
+        <p:txBody>
+          <a:bodyPr wrap="square" lIns="0" tIns="0" rIns="0" bIns="0" rtlCol="0" anchor="t"/>
+          <a:lstStyle/>
+          <a:p>
+            <a:pPr algn="l" indent="0" marL="0">
+              <a:lnSpc>
+                <a:spcPts val="2426"/>
+              </a:lnSpc>
+              <a:buNone/>
+            </a:pPr>
+            <a:r>
+              <a:rPr lang="en-US" sz="1733" b="1" dirty="0">
+                <a:solidFill>
+                  <a:srgbClr val="0E0E0E"/>
+                </a:solidFill>
+                <a:latin typeface="Archivo" pitchFamily="34" charset="0"/>
+                <a:ea typeface="Archivo" pitchFamily="34" charset="-122"/>
+                <a:cs typeface="Archivo" pitchFamily="34" charset="-120"/>
+              </a:rPr>
+              <a:t>THE REVOKE BUTTON</a:t>
+            </a:r>
+            <a:endParaRPr lang="en-US" sz="1733" dirty="0"/>
+          </a:p>
+        </p:txBody>
+      </p:sp>
+      <p:sp>
+        <p:nvSpPr>
+          <p:cNvPr id="11" name="Text 9"/>
+          <p:cNvSpPr/>
+          <p:nvPr/>
+        </p:nvSpPr>
+        <p:spPr>
+          <a:xfrm>
+            <a:off x="4833126" y="3773686"/>
+            <a:ext cx="6579189" cy="736600"/>
+          </a:xfrm>
+          <a:prstGeom prst="rect">
+            <a:avLst/>
+          </a:prstGeom>
+          <a:noFill/>
+          <a:ln/>
+        </p:spPr>
+        <p:txBody>
+          <a:bodyPr wrap="square" lIns="0" tIns="0" rIns="0" bIns="0" rtlCol="0" anchor="t"/>
+          <a:lstStyle/>
+          <a:p>
+            <a:pPr algn="l" indent="0" marL="0">
+              <a:lnSpc>
+                <a:spcPts val="2900"/>
+              </a:lnSpc>
+              <a:buNone/>
+            </a:pPr>
+            <a:r>
+              <a:rPr lang="en-US" sz="2000" dirty="0">
+                <a:solidFill>
+                  <a:srgbClr val="0E0E0E"/>
+                </a:solidFill>
+                <a:latin typeface="Archivo" pitchFamily="34" charset="0"/>
+                <a:ea typeface="Archivo" pitchFamily="34" charset="-122"/>
+                <a:cs typeface="Archivo" pitchFamily="34" charset="-120"/>
+              </a:rPr>
+              <a:t>Who can revoke, alone, at any hour, without asking permission — and when did they last do it?</a:t>
+            </a:r>
+            <a:endParaRPr lang="en-US" sz="2000" dirty="0"/>
+          </a:p>
+        </p:txBody>
+      </p:sp>
+      <p:sp>
+        <p:nvSpPr>
+          <p:cNvPr id="12" name="Text 10"/>
+          <p:cNvSpPr/>
+          <p:nvPr/>
+        </p:nvSpPr>
+        <p:spPr>
+          <a:xfrm>
+            <a:off x="609448" y="4763889"/>
+            <a:ext cx="10970057" cy="1032669"/>
+          </a:xfrm>
+          <a:prstGeom prst="rect">
+            <a:avLst/>
+          </a:prstGeom>
+          <a:noFill/>
+          <a:ln w="25397">
+            <a:solidFill>
+              <a:srgbClr val="FFFFFF"/>
+            </a:solidFill>
+          </a:ln>
+        </p:spPr>
+        <p:txBody>
+          <a:bodyPr wrap="square" rtlCol="0" anchor="ctr"/>
+          <a:lstStyle/>
+          <a:p>
+            <a:pPr indent="0" marL="0">
+              <a:buNone/>
+            </a:pPr>
+            <a:endParaRPr lang="en-US" dirty="0"/>
+          </a:p>
+        </p:txBody>
+      </p:sp>
+      <p:sp>
+        <p:nvSpPr>
+          <p:cNvPr id="13" name="Text 11"/>
+          <p:cNvSpPr/>
+          <p:nvPr/>
+        </p:nvSpPr>
+        <p:spPr>
+          <a:xfrm>
+            <a:off x="905641" y="4941689"/>
+            <a:ext cx="794246" cy="711002"/>
+          </a:xfrm>
+          <a:prstGeom prst="rect">
+            <a:avLst/>
+          </a:prstGeom>
+          <a:noFill/>
+          <a:ln/>
+        </p:spPr>
+        <p:txBody>
+          <a:bodyPr wrap="square" lIns="0" tIns="0" rIns="0" bIns="0" rtlCol="0" anchor="t"/>
+          <a:lstStyle/>
+          <a:p>
+            <a:pPr algn="l" indent="0" marL="0">
+              <a:lnSpc>
+                <a:spcPts val="5599"/>
+              </a:lnSpc>
+              <a:buNone/>
+            </a:pPr>
+            <a:r>
+              <a:rPr lang="en-US" sz="3733" dirty="0">
+                <a:solidFill>
+                  <a:srgbClr val="FFFFFF"/>
+                </a:solidFill>
+                <a:latin typeface="Anton" pitchFamily="34" charset="0"/>
+                <a:ea typeface="Anton" pitchFamily="34" charset="-122"/>
+                <a:cs typeface="Anton" pitchFamily="34" charset="-120"/>
+              </a:rPr>
+              <a:t>03</a:t>
+            </a:r>
+            <a:endParaRPr lang="en-US" sz="3733" dirty="0"/>
+          </a:p>
+        </p:txBody>
+      </p:sp>
+      <p:sp>
+        <p:nvSpPr>
+          <p:cNvPr id="14" name="Text 12"/>
+          <p:cNvSpPr/>
+          <p:nvPr/>
+        </p:nvSpPr>
+        <p:spPr>
+          <a:xfrm>
+            <a:off x="1989037" y="4941689"/>
+            <a:ext cx="2590152" cy="615950"/>
+          </a:xfrm>
+          <a:prstGeom prst="rect">
+            <a:avLst/>
+          </a:prstGeom>
+          <a:noFill/>
+          <a:ln/>
+        </p:spPr>
+        <p:txBody>
+          <a:bodyPr wrap="square" lIns="0" tIns="0" rIns="0" bIns="0" rtlCol="0" anchor="t"/>
+          <a:lstStyle/>
+          <a:p>
+            <a:pPr algn="l" indent="0" marL="0">
+              <a:lnSpc>
+                <a:spcPts val="2426"/>
+              </a:lnSpc>
+              <a:buNone/>
+            </a:pPr>
+            <a:r>
+              <a:rPr lang="en-US" sz="1733" b="1" dirty="0">
+                <a:solidFill>
+                  <a:srgbClr val="FFFFFF"/>
+                </a:solidFill>
+                <a:latin typeface="Archivo" pitchFamily="34" charset="0"/>
+                <a:ea typeface="Archivo" pitchFamily="34" charset="-122"/>
+                <a:cs typeface="Archivo" pitchFamily="34" charset="-120"/>
+              </a:rPr>
+              <a:t>THE ONES ALREADY OUT</a:t>
+            </a:r>
+            <a:endParaRPr lang="en-US" sz="1733" dirty="0"/>
+          </a:p>
+        </p:txBody>
+      </p:sp>
+      <p:sp>
+        <p:nvSpPr>
+          <p:cNvPr id="15" name="Text 13"/>
+          <p:cNvSpPr/>
+          <p:nvPr/>
+        </p:nvSpPr>
+        <p:spPr>
+          <a:xfrm>
+            <a:off x="4833126" y="4941689"/>
+            <a:ext cx="6579189" cy="736600"/>
+          </a:xfrm>
+          <a:prstGeom prst="rect">
+            <a:avLst/>
+          </a:prstGeom>
+          <a:noFill/>
+          <a:ln/>
+        </p:spPr>
+        <p:txBody>
+          <a:bodyPr wrap="square" lIns="0" tIns="0" rIns="0" bIns="0" rtlCol="0" anchor="t"/>
+          <a:lstStyle/>
+          <a:p>
+            <a:pPr algn="l" indent="0" marL="0">
+              <a:lnSpc>
+                <a:spcPts val="2900"/>
+              </a:lnSpc>
+              <a:buNone/>
+            </a:pPr>
+            <a:r>
+              <a:rPr lang="en-US" sz="2000" dirty="0">
+                <a:solidFill>
+                  <a:srgbClr val="FFFFFF"/>
+                </a:solidFill>
+                <a:latin typeface="Archivo" pitchFamily="34" charset="0"/>
+                <a:ea typeface="Archivo" pitchFamily="34" charset="-122"/>
+                <a:cs typeface="Archivo" pitchFamily="34" charset="-120"/>
+              </a:rPr>
+              <a:t>What happens to the secrets already in circulation: rotate them now, or record that we treat them as permanent?</a:t>
+            </a:r>
+            <a:endParaRPr lang="en-US" sz="2000" dirty="0"/>
+          </a:p>
+        </p:txBody>
+      </p:sp>
+      <p:sp>
+        <p:nvSpPr>
+          <p:cNvPr id="16" name="Text 14"/>
+          <p:cNvSpPr/>
+          <p:nvPr/>
+        </p:nvSpPr>
+        <p:spPr>
+          <a:xfrm>
+            <a:off x="609448" y="6101159"/>
+            <a:ext cx="5698335" cy="248841"/>
+          </a:xfrm>
+          <a:prstGeom prst="rect">
+            <a:avLst/>
+          </a:prstGeom>
+          <a:noFill/>
+          <a:ln/>
+        </p:spPr>
+        <p:txBody>
+          <a:bodyPr wrap="square" lIns="0" tIns="0" rIns="0" bIns="0" rtlCol="0" anchor="t"/>
+          <a:lstStyle/>
+          <a:p>
+            <a:pPr algn="l" indent="0" marL="0">
+              <a:lnSpc>
+                <a:spcPts val="1960"/>
+              </a:lnSpc>
+              <a:buNone/>
+            </a:pPr>
+            <a:r>
+              <a:rPr lang="en-US" sz="1400" dirty="0">
+                <a:solidFill>
+                  <a:srgbClr val="FFFFFF"/>
+                </a:solidFill>
+                <a:latin typeface="Archivo" pitchFamily="34" charset="0"/>
+                <a:ea typeface="Archivo" pitchFamily="34" charset="-122"/>
+                <a:cs typeface="Archivo" pitchFamily="34" charset="-120"/>
+              </a:rPr>
+              <a:t>No sourced figures in this deck — the mechanism is argued, not priced.</a:t>
+            </a:r>
+            <a:endParaRPr lang="en-US" sz="1400" dirty="0"/>
+          </a:p>
+        </p:txBody>
+      </p:sp>
+      <p:sp>
+        <p:nvSpPr>
+          <p:cNvPr id="17" name="Text 15"/>
+          <p:cNvSpPr/>
+          <p:nvPr/>
+        </p:nvSpPr>
+        <p:spPr>
+          <a:xfrm>
+            <a:off x="11347787" y="6101159"/>
+            <a:ext cx="236351" cy="248841"/>
+          </a:xfrm>
+          <a:prstGeom prst="rect">
+            <a:avLst/>
+          </a:prstGeom>
+          <a:noFill/>
+          <a:ln/>
+        </p:spPr>
+        <p:txBody>
+          <a:bodyPr wrap="square" lIns="0" tIns="0" rIns="0" bIns="0" rtlCol="0" anchor="t"/>
+          <a:lstStyle/>
+          <a:p>
+            <a:pPr algn="l" indent="0" marL="0">
+              <a:lnSpc>
+                <a:spcPts val="1960"/>
+              </a:lnSpc>
+              <a:buNone/>
+            </a:pPr>
+            <a:r>
+              <a:rPr lang="en-US" sz="1400" b="1" dirty="0">
+                <a:solidFill>
+                  <a:srgbClr val="FFFFFF"/>
+                </a:solidFill>
+                <a:latin typeface="Archivo" pitchFamily="34" charset="0"/>
+                <a:ea typeface="Archivo" pitchFamily="34" charset="-122"/>
+                <a:cs typeface="Archivo" pitchFamily="34" charset="-120"/>
+              </a:rPr>
+              <a:t>05</a:t>
+            </a:r>
+            <a:endParaRPr lang="en-US" sz="1400" dirty="0"/>
+          </a:p>
+        </p:txBody>
+      </p:sp>
     </p:spTree>
   </p:cSld>
   <p:clrMapOvr>

--- a/decks/secrets/secrets.pptx
+++ b/decks/secrets/secrets.pptx
@@ -1249,7 +1249,7 @@
           <a:ln/>
         </p:spPr>
         <p:txBody>
-          <a:bodyPr wrap="square" lIns="0" tIns="0" rIns="0" bIns="0" rtlCol="0" anchor="t"/>
+          <a:bodyPr wrap="none" lIns="0" tIns="0" rIns="0" bIns="0" rtlCol="0" anchor="t"/>
           <a:lstStyle/>
           <a:p>
             <a:pPr algn="l" indent="0" marL="0">
@@ -1294,7 +1294,9 @@
           <a:ln/>
         </p:spPr>
         <p:txBody>
-          <a:bodyPr wrap="square" lIns="0" tIns="0" rIns="0" bIns="0" rtlCol="0" anchor="t"/>
+          <a:bodyPr wrap="square" lIns="0" tIns="0" rIns="0" bIns="0" rtlCol="0" anchor="t">
+            <a:normAutofit/>
+          </a:bodyPr>
           <a:lstStyle/>
           <a:p>
             <a:pPr algn="l" indent="0" marL="0">
@@ -1392,7 +1394,9 @@
           <a:ln/>
         </p:spPr>
         <p:txBody>
-          <a:bodyPr wrap="square" lIns="0" tIns="0" rIns="0" bIns="0" rtlCol="0" anchor="t"/>
+          <a:bodyPr wrap="square" lIns="0" tIns="0" rIns="0" bIns="0" rtlCol="0" anchor="t">
+            <a:normAutofit/>
+          </a:bodyPr>
           <a:lstStyle/>
           <a:p>
             <a:pPr algn="l" indent="0" marL="0">
@@ -1434,7 +1438,7 @@
           <a:ln/>
         </p:spPr>
         <p:txBody>
-          <a:bodyPr wrap="square" lIns="0" tIns="0" rIns="0" bIns="0" rtlCol="0" anchor="t"/>
+          <a:bodyPr wrap="none" lIns="0" tIns="0" rIns="0" bIns="0" rtlCol="0" anchor="t"/>
           <a:lstStyle/>
           <a:p>
             <a:pPr algn="l" indent="0" marL="0">
@@ -1476,7 +1480,7 @@
           <a:ln/>
         </p:spPr>
         <p:txBody>
-          <a:bodyPr wrap="square" lIns="0" tIns="0" rIns="0" bIns="0" rtlCol="0" anchor="t"/>
+          <a:bodyPr wrap="none" lIns="0" tIns="0" rIns="0" bIns="0" rtlCol="0" anchor="t"/>
           <a:lstStyle/>
           <a:p>
             <a:pPr algn="l" indent="0" marL="0">
@@ -1550,7 +1554,7 @@
           <a:ln/>
         </p:spPr>
         <p:txBody>
-          <a:bodyPr wrap="square" lIns="0" tIns="0" rIns="0" bIns="0" rtlCol="0" anchor="t"/>
+          <a:bodyPr wrap="none" lIns="0" tIns="0" rIns="0" bIns="0" rtlCol="0" anchor="t"/>
           <a:lstStyle/>
           <a:p>
             <a:pPr algn="l" indent="0" marL="0">
@@ -1595,7 +1599,7 @@
           <a:ln/>
         </p:spPr>
         <p:txBody>
-          <a:bodyPr wrap="square" lIns="0" tIns="0" rIns="0" bIns="0" rtlCol="0" anchor="t"/>
+          <a:bodyPr wrap="none" lIns="0" tIns="0" rIns="0" bIns="0" rtlCol="0" anchor="t"/>
           <a:lstStyle/>
           <a:p>
             <a:pPr algn="l" indent="0" marL="0">
@@ -1717,7 +1721,9 @@
           <a:ln/>
         </p:spPr>
         <p:txBody>
-          <a:bodyPr wrap="square" lIns="0" tIns="0" rIns="0" bIns="0" rtlCol="0" anchor="t"/>
+          <a:bodyPr wrap="square" lIns="0" tIns="0" rIns="0" bIns="0" rtlCol="0" anchor="t">
+            <a:normAutofit/>
+          </a:bodyPr>
           <a:lstStyle/>
           <a:p>
             <a:pPr algn="l" indent="0" marL="0">
@@ -1791,7 +1797,9 @@
           <a:ln/>
         </p:spPr>
         <p:txBody>
-          <a:bodyPr wrap="square" lIns="0" tIns="0" rIns="0" bIns="0" rtlCol="0" anchor="t"/>
+          <a:bodyPr wrap="square" lIns="0" tIns="0" rIns="0" bIns="0" rtlCol="0" anchor="t">
+            <a:normAutofit/>
+          </a:bodyPr>
           <a:lstStyle/>
           <a:p>
             <a:pPr algn="l" indent="0" marL="0">
@@ -1836,7 +1844,9 @@
           <a:ln/>
         </p:spPr>
         <p:txBody>
-          <a:bodyPr wrap="square" lIns="0" tIns="0" rIns="0" bIns="0" rtlCol="0" anchor="t"/>
+          <a:bodyPr wrap="square" lIns="0" tIns="0" rIns="0" bIns="0" rtlCol="0" anchor="t">
+            <a:normAutofit/>
+          </a:bodyPr>
           <a:lstStyle/>
           <a:p>
             <a:pPr algn="l" indent="0" marL="0">
@@ -1957,7 +1967,9 @@
           <a:ln/>
         </p:spPr>
         <p:txBody>
-          <a:bodyPr wrap="square" lIns="0" tIns="0" rIns="0" bIns="0" rtlCol="0" anchor="t"/>
+          <a:bodyPr wrap="square" lIns="0" tIns="0" rIns="0" bIns="0" rtlCol="0" anchor="t">
+            <a:normAutofit/>
+          </a:bodyPr>
           <a:lstStyle/>
           <a:p>
             <a:pPr algn="l" indent="0" marL="0">
@@ -1999,7 +2011,7 @@
           <a:ln/>
         </p:spPr>
         <p:txBody>
-          <a:bodyPr wrap="square" lIns="0" tIns="0" rIns="0" bIns="0" rtlCol="0" anchor="t"/>
+          <a:bodyPr wrap="none" lIns="0" tIns="0" rIns="0" bIns="0" rtlCol="0" anchor="t"/>
           <a:lstStyle/>
           <a:p>
             <a:pPr algn="l" indent="0" marL="0">
@@ -2041,7 +2053,7 @@
           <a:ln/>
         </p:spPr>
         <p:txBody>
-          <a:bodyPr wrap="square" lIns="0" tIns="0" rIns="0" bIns="0" rtlCol="0" anchor="t"/>
+          <a:bodyPr wrap="none" lIns="0" tIns="0" rIns="0" bIns="0" rtlCol="0" anchor="t"/>
           <a:lstStyle/>
           <a:p>
             <a:pPr algn="l" indent="0" marL="0">
@@ -2115,7 +2127,7 @@
           <a:ln/>
         </p:spPr>
         <p:txBody>
-          <a:bodyPr wrap="square" lIns="0" tIns="0" rIns="0" bIns="0" rtlCol="0" anchor="t"/>
+          <a:bodyPr wrap="none" lIns="0" tIns="0" rIns="0" bIns="0" rtlCol="0" anchor="t"/>
           <a:lstStyle/>
           <a:p>
             <a:pPr algn="l" indent="0" marL="0">
@@ -2160,7 +2172,7 @@
           <a:ln/>
         </p:spPr>
         <p:txBody>
-          <a:bodyPr wrap="square" lIns="0" tIns="0" rIns="0" bIns="0" rtlCol="0" anchor="t"/>
+          <a:bodyPr wrap="none" lIns="0" tIns="0" rIns="0" bIns="0" rtlCol="0" anchor="t"/>
           <a:lstStyle/>
           <a:p>
             <a:pPr algn="l" indent="0" marL="0">
@@ -2237,7 +2249,7 @@
           <a:ln/>
         </p:spPr>
         <p:txBody>
-          <a:bodyPr wrap="square" lIns="0" tIns="0" rIns="0" bIns="0" rtlCol="0" anchor="t"/>
+          <a:bodyPr wrap="none" lIns="0" tIns="0" rIns="0" bIns="0" rtlCol="0" anchor="t"/>
           <a:lstStyle/>
           <a:p>
             <a:pPr algn="l" indent="0" marL="0">
@@ -2279,7 +2291,9 @@
           <a:ln/>
         </p:spPr>
         <p:txBody>
-          <a:bodyPr wrap="square" lIns="0" tIns="0" rIns="0" bIns="0" rtlCol="0" anchor="t"/>
+          <a:bodyPr wrap="square" lIns="0" tIns="0" rIns="0" bIns="0" rtlCol="0" anchor="t">
+            <a:normAutofit/>
+          </a:bodyPr>
           <a:lstStyle/>
           <a:p>
             <a:pPr algn="l" indent="0" marL="0">
@@ -2355,7 +2369,9 @@
           <a:ln/>
         </p:spPr>
         <p:txBody>
-          <a:bodyPr wrap="square" lIns="0" tIns="0" rIns="0" bIns="0" rtlCol="0" anchor="t"/>
+          <a:bodyPr wrap="square" lIns="0" tIns="0" rIns="0" bIns="0" rtlCol="0" anchor="t">
+            <a:normAutofit/>
+          </a:bodyPr>
           <a:lstStyle/>
           <a:p>
             <a:pPr algn="l" indent="0" marL="0">
@@ -2397,7 +2413,9 @@
           <a:ln/>
         </p:spPr>
         <p:txBody>
-          <a:bodyPr wrap="square" lIns="0" tIns="0" rIns="0" bIns="0" rtlCol="0" anchor="t"/>
+          <a:bodyPr wrap="square" lIns="0" tIns="0" rIns="0" bIns="0" rtlCol="0" anchor="t">
+            <a:normAutofit/>
+          </a:bodyPr>
           <a:lstStyle/>
           <a:p>
             <a:pPr algn="l" indent="0" marL="0">
@@ -2513,7 +2531,9 @@
           <a:ln/>
         </p:spPr>
         <p:txBody>
-          <a:bodyPr wrap="square" lIns="0" tIns="0" rIns="0" bIns="0" rtlCol="0" anchor="t"/>
+          <a:bodyPr wrap="square" lIns="0" tIns="0" rIns="0" bIns="0" rtlCol="0" anchor="t">
+            <a:normAutofit/>
+          </a:bodyPr>
           <a:lstStyle/>
           <a:p>
             <a:pPr algn="l" indent="0" marL="0">
@@ -2555,7 +2575,7 @@
           <a:ln/>
         </p:spPr>
         <p:txBody>
-          <a:bodyPr wrap="square" lIns="0" tIns="0" rIns="0" bIns="0" rtlCol="0" anchor="t"/>
+          <a:bodyPr wrap="none" lIns="0" tIns="0" rIns="0" bIns="0" rtlCol="0" anchor="t"/>
           <a:lstStyle/>
           <a:p>
             <a:pPr algn="l" indent="0" marL="0">
@@ -2597,7 +2617,7 @@
           <a:ln/>
         </p:spPr>
         <p:txBody>
-          <a:bodyPr wrap="square" lIns="0" tIns="0" rIns="0" bIns="0" rtlCol="0" anchor="t"/>
+          <a:bodyPr wrap="none" lIns="0" tIns="0" rIns="0" bIns="0" rtlCol="0" anchor="t"/>
           <a:lstStyle/>
           <a:p>
             <a:pPr algn="l" indent="0" marL="0">
@@ -2671,7 +2691,7 @@
           <a:ln/>
         </p:spPr>
         <p:txBody>
-          <a:bodyPr wrap="square" lIns="0" tIns="0" rIns="0" bIns="0" rtlCol="0" anchor="t"/>
+          <a:bodyPr wrap="none" lIns="0" tIns="0" rIns="0" bIns="0" rtlCol="0" anchor="t"/>
           <a:lstStyle/>
           <a:p>
             <a:pPr algn="l" indent="0" marL="0">
@@ -2716,7 +2736,7 @@
           <a:ln/>
         </p:spPr>
         <p:txBody>
-          <a:bodyPr wrap="square" lIns="0" tIns="0" rIns="0" bIns="0" rtlCol="0" anchor="t"/>
+          <a:bodyPr wrap="none" lIns="0" tIns="0" rIns="0" bIns="0" rtlCol="0" anchor="t"/>
           <a:lstStyle/>
           <a:p>
             <a:pPr algn="l" indent="0" marL="0">
@@ -2838,7 +2858,9 @@
           <a:ln/>
         </p:spPr>
         <p:txBody>
-          <a:bodyPr wrap="square" lIns="0" tIns="0" rIns="0" bIns="0" rtlCol="0" anchor="t"/>
+          <a:bodyPr wrap="square" lIns="0" tIns="0" rIns="0" bIns="0" rtlCol="0" anchor="t">
+            <a:normAutofit/>
+          </a:bodyPr>
           <a:lstStyle/>
           <a:p>
             <a:pPr algn="l" indent="0" marL="0">
@@ -2914,7 +2936,9 @@
           <a:ln/>
         </p:spPr>
         <p:txBody>
-          <a:bodyPr wrap="square" lIns="0" tIns="0" rIns="0" bIns="0" rtlCol="0" anchor="t"/>
+          <a:bodyPr wrap="square" lIns="0" tIns="0" rIns="0" bIns="0" rtlCol="0" anchor="t">
+            <a:normAutofit/>
+          </a:bodyPr>
           <a:lstStyle/>
           <a:p>
             <a:pPr algn="l" indent="0" marL="0">
@@ -2959,7 +2983,9 @@
           <a:ln/>
         </p:spPr>
         <p:txBody>
-          <a:bodyPr wrap="square" lIns="0" tIns="0" rIns="0" bIns="0" rtlCol="0" anchor="t"/>
+          <a:bodyPr wrap="square" lIns="0" tIns="0" rIns="0" bIns="0" rtlCol="0" anchor="t">
+            <a:normAutofit/>
+          </a:bodyPr>
           <a:lstStyle/>
           <a:p>
             <a:pPr algn="l" indent="0" marL="0">
@@ -3078,7 +3104,9 @@
           <a:ln/>
         </p:spPr>
         <p:txBody>
-          <a:bodyPr wrap="square" lIns="0" tIns="0" rIns="0" bIns="0" rtlCol="0" anchor="t"/>
+          <a:bodyPr wrap="square" lIns="0" tIns="0" rIns="0" bIns="0" rtlCol="0" anchor="t">
+            <a:normAutofit/>
+          </a:bodyPr>
           <a:lstStyle/>
           <a:p>
             <a:pPr algn="l" indent="0" marL="0">
@@ -3120,7 +3148,7 @@
           <a:ln/>
         </p:spPr>
         <p:txBody>
-          <a:bodyPr wrap="square" lIns="0" tIns="0" rIns="0" bIns="0" rtlCol="0" anchor="t"/>
+          <a:bodyPr wrap="none" lIns="0" tIns="0" rIns="0" bIns="0" rtlCol="0" anchor="t"/>
           <a:lstStyle/>
           <a:p>
             <a:pPr algn="l" indent="0" marL="0">
@@ -3162,7 +3190,7 @@
           <a:ln/>
         </p:spPr>
         <p:txBody>
-          <a:bodyPr wrap="square" lIns="0" tIns="0" rIns="0" bIns="0" rtlCol="0" anchor="t"/>
+          <a:bodyPr wrap="none" lIns="0" tIns="0" rIns="0" bIns="0" rtlCol="0" anchor="t"/>
           <a:lstStyle/>
           <a:p>
             <a:pPr algn="l" indent="0" marL="0">
@@ -3236,7 +3264,7 @@
           <a:ln/>
         </p:spPr>
         <p:txBody>
-          <a:bodyPr wrap="square" lIns="0" tIns="0" rIns="0" bIns="0" rtlCol="0" anchor="t"/>
+          <a:bodyPr wrap="none" lIns="0" tIns="0" rIns="0" bIns="0" rtlCol="0" anchor="t"/>
           <a:lstStyle/>
           <a:p>
             <a:pPr algn="l" indent="0" marL="0">
@@ -3281,7 +3309,7 @@
           <a:ln/>
         </p:spPr>
         <p:txBody>
-          <a:bodyPr wrap="square" lIns="0" tIns="0" rIns="0" bIns="0" rtlCol="0" anchor="t"/>
+          <a:bodyPr wrap="none" lIns="0" tIns="0" rIns="0" bIns="0" rtlCol="0" anchor="t"/>
           <a:lstStyle/>
           <a:p>
             <a:pPr algn="l" indent="0" marL="0">
@@ -3358,7 +3386,7 @@
           <a:ln/>
         </p:spPr>
         <p:txBody>
-          <a:bodyPr wrap="square" lIns="0" tIns="0" rIns="0" bIns="0" rtlCol="0" anchor="t"/>
+          <a:bodyPr wrap="none" lIns="0" tIns="0" rIns="0" bIns="0" rtlCol="0" anchor="t"/>
           <a:lstStyle/>
           <a:p>
             <a:pPr algn="l" indent="0" marL="0">
@@ -3400,7 +3428,7 @@
           <a:ln/>
         </p:spPr>
         <p:txBody>
-          <a:bodyPr wrap="square" lIns="0" tIns="0" rIns="0" bIns="0" rtlCol="0" anchor="t"/>
+          <a:bodyPr wrap="none" lIns="0" tIns="0" rIns="0" bIns="0" rtlCol="0" anchor="t"/>
           <a:lstStyle/>
           <a:p>
             <a:pPr algn="l" indent="0" marL="0">
@@ -3442,7 +3470,9 @@
           <a:ln/>
         </p:spPr>
         <p:txBody>
-          <a:bodyPr wrap="square" lIns="0" tIns="0" rIns="0" bIns="0" rtlCol="0" anchor="t"/>
+          <a:bodyPr wrap="square" lIns="0" tIns="0" rIns="0" bIns="0" rtlCol="0" anchor="t">
+            <a:normAutofit/>
+          </a:bodyPr>
           <a:lstStyle/>
           <a:p>
             <a:pPr algn="l" indent="0" marL="0">
@@ -3518,7 +3548,7 @@
           <a:ln/>
         </p:spPr>
         <p:txBody>
-          <a:bodyPr wrap="square" lIns="0" tIns="0" rIns="0" bIns="0" rtlCol="0" anchor="t"/>
+          <a:bodyPr wrap="none" lIns="0" tIns="0" rIns="0" bIns="0" rtlCol="0" anchor="t"/>
           <a:lstStyle/>
           <a:p>
             <a:pPr algn="l" indent="0" marL="0">
@@ -3602,7 +3632,9 @@
           <a:ln/>
         </p:spPr>
         <p:txBody>
-          <a:bodyPr wrap="square" lIns="0" tIns="0" rIns="0" bIns="0" rtlCol="0" anchor="t"/>
+          <a:bodyPr wrap="square" lIns="0" tIns="0" rIns="0" bIns="0" rtlCol="0" anchor="t">
+            <a:normAutofit/>
+          </a:bodyPr>
           <a:lstStyle/>
           <a:p>
             <a:pPr algn="l" indent="0" marL="0">
@@ -3676,7 +3708,7 @@
           <a:ln/>
         </p:spPr>
         <p:txBody>
-          <a:bodyPr wrap="square" lIns="0" tIns="0" rIns="0" bIns="0" rtlCol="0" anchor="t"/>
+          <a:bodyPr wrap="none" lIns="0" tIns="0" rIns="0" bIns="0" rtlCol="0" anchor="t"/>
           <a:lstStyle/>
           <a:p>
             <a:pPr algn="l" indent="0" marL="0">
@@ -3718,7 +3750,9 @@
           <a:ln/>
         </p:spPr>
         <p:txBody>
-          <a:bodyPr wrap="square" lIns="0" tIns="0" rIns="0" bIns="0" rtlCol="0" anchor="t"/>
+          <a:bodyPr wrap="square" lIns="0" tIns="0" rIns="0" bIns="0" rtlCol="0" anchor="t">
+            <a:normAutofit/>
+          </a:bodyPr>
           <a:lstStyle/>
           <a:p>
             <a:pPr algn="l" indent="0" marL="0">
@@ -3760,7 +3794,9 @@
           <a:ln/>
         </p:spPr>
         <p:txBody>
-          <a:bodyPr wrap="square" lIns="0" tIns="0" rIns="0" bIns="0" rtlCol="0" anchor="t"/>
+          <a:bodyPr wrap="square" lIns="0" tIns="0" rIns="0" bIns="0" rtlCol="0" anchor="t">
+            <a:normAutofit/>
+          </a:bodyPr>
           <a:lstStyle/>
           <a:p>
             <a:pPr algn="l" indent="0" marL="0">
@@ -3802,7 +3838,7 @@
           <a:ln/>
         </p:spPr>
         <p:txBody>
-          <a:bodyPr wrap="square" lIns="0" tIns="0" rIns="0" bIns="0" rtlCol="0" anchor="t"/>
+          <a:bodyPr wrap="none" lIns="0" tIns="0" rIns="0" bIns="0" rtlCol="0" anchor="t"/>
           <a:lstStyle/>
           <a:p>
             <a:pPr algn="l" indent="0" marL="0">
@@ -3844,7 +3880,7 @@
           <a:ln/>
         </p:spPr>
         <p:txBody>
-          <a:bodyPr wrap="square" lIns="0" tIns="0" rIns="0" bIns="0" rtlCol="0" anchor="t"/>
+          <a:bodyPr wrap="none" lIns="0" tIns="0" rIns="0" bIns="0" rtlCol="0" anchor="t"/>
           <a:lstStyle/>
           <a:p>
             <a:pPr algn="l" indent="0" marL="0">

--- a/decks/secrets/secrets.pptx
+++ b/decks/secrets/secrets.pptx
@@ -1294,9 +1294,7 @@
           <a:ln/>
         </p:spPr>
         <p:txBody>
-          <a:bodyPr wrap="square" lIns="0" tIns="0" rIns="0" bIns="0" rtlCol="0" anchor="t">
-            <a:normAutofit/>
-          </a:bodyPr>
+          <a:bodyPr wrap="none" lIns="0" tIns="0" rIns="0" bIns="0" rtlCol="0" anchor="t"/>
           <a:lstStyle/>
           <a:p>
             <a:pPr algn="l" indent="0" marL="0">
@@ -2736,7 +2734,9 @@
           <a:ln/>
         </p:spPr>
         <p:txBody>
-          <a:bodyPr wrap="none" lIns="0" tIns="0" rIns="0" bIns="0" rtlCol="0" anchor="t"/>
+          <a:bodyPr wrap="square" lIns="0" tIns="0" rIns="0" bIns="0" rtlCol="0" anchor="t">
+            <a:normAutofit/>
+          </a:bodyPr>
           <a:lstStyle/>
           <a:p>
             <a:pPr algn="l" indent="0" marL="0">
